--- a/TRADE BAT DIET.pptx
+++ b/TRADE BAT DIET.pptx
@@ -282,6 +282,13 @@
               <a:schemeClr val="lt1"/>
             </a:fontRef>
           </p:style>
+          <p:txBody>
+            <a:bodyPr/>
+            <a:lstStyle/>
+            <a:p>
+              <a:endParaRPr lang="en-US"/>
+            </a:p>
+          </p:txBody>
         </p:sp>
         <p:sp>
           <p:nvSpPr>
@@ -345,6 +352,13 @@
               <a:schemeClr val="lt1"/>
             </a:fontRef>
           </p:style>
+          <p:txBody>
+            <a:bodyPr/>
+            <a:lstStyle/>
+            <a:p>
+              <a:endParaRPr lang="en-US"/>
+            </a:p>
+          </p:txBody>
         </p:sp>
         <p:sp>
           <p:nvSpPr>
@@ -386,6 +400,13 @@
               <a:schemeClr val="lt1"/>
             </a:fontRef>
           </p:style>
+          <p:txBody>
+            <a:bodyPr/>
+            <a:lstStyle/>
+            <a:p>
+              <a:endParaRPr lang="en-US"/>
+            </a:p>
+          </p:txBody>
         </p:sp>
         <p:sp>
           <p:nvSpPr>
@@ -450,6 +471,13 @@
               <a:schemeClr val="lt1"/>
             </a:fontRef>
           </p:style>
+          <p:txBody>
+            <a:bodyPr/>
+            <a:lstStyle/>
+            <a:p>
+              <a:endParaRPr lang="en-US"/>
+            </a:p>
+          </p:txBody>
         </p:sp>
         <p:sp>
           <p:nvSpPr>
@@ -515,6 +543,13 @@
               <a:schemeClr val="lt1"/>
             </a:fontRef>
           </p:style>
+          <p:txBody>
+            <a:bodyPr/>
+            <a:lstStyle/>
+            <a:p>
+              <a:endParaRPr lang="en-US"/>
+            </a:p>
+          </p:txBody>
         </p:sp>
         <p:sp>
           <p:nvSpPr>
@@ -578,6 +613,13 @@
               <a:schemeClr val="lt1"/>
             </a:fontRef>
           </p:style>
+          <p:txBody>
+            <a:bodyPr/>
+            <a:lstStyle/>
+            <a:p>
+              <a:endParaRPr lang="en-US"/>
+            </a:p>
+          </p:txBody>
         </p:sp>
         <p:sp>
           <p:nvSpPr>
@@ -619,6 +661,13 @@
               <a:schemeClr val="lt1"/>
             </a:fontRef>
           </p:style>
+          <p:txBody>
+            <a:bodyPr/>
+            <a:lstStyle/>
+            <a:p>
+              <a:endParaRPr lang="en-US"/>
+            </a:p>
+          </p:txBody>
         </p:sp>
         <p:sp>
           <p:nvSpPr>
@@ -660,6 +709,13 @@
               <a:schemeClr val="lt1"/>
             </a:fontRef>
           </p:style>
+          <p:txBody>
+            <a:bodyPr/>
+            <a:lstStyle/>
+            <a:p>
+              <a:endParaRPr lang="en-US"/>
+            </a:p>
+          </p:txBody>
         </p:sp>
       </p:grpSp>
       <p:sp>
@@ -693,7 +749,7 @@
           </a:lstStyle>
           <a:p>
             <a:r>
-              <a:rPr lang="en-US" smtClean="0"/>
+              <a:rPr lang="en-US"/>
               <a:t>Click to edit Master title style</a:t>
             </a:r>
             <a:endParaRPr lang="en-US" dirty="0"/>
@@ -813,7 +869,7 @@
           </a:lstStyle>
           <a:p>
             <a:r>
-              <a:rPr lang="en-US" smtClean="0"/>
+              <a:rPr lang="en-US"/>
               <a:t>Click to edit Master subtitle style</a:t>
             </a:r>
             <a:endParaRPr lang="en-US" dirty="0"/>
@@ -837,7 +893,7 @@
           <a:p>
             <a:fld id="{F2A8A90E-0BBF-4AA7-9155-7B1E9439A4DB}" type="datetimeFigureOut">
               <a:rPr lang="en-US" smtClean="0"/>
-              <a:t>2/13/2025</a:t>
+              <a:t>7/8/2026</a:t>
             </a:fld>
             <a:endParaRPr lang="en-US"/>
           </a:p>
@@ -942,7 +998,7 @@
           </a:lstStyle>
           <a:p>
             <a:r>
-              <a:rPr lang="en-US" smtClean="0"/>
+              <a:rPr lang="en-US"/>
               <a:t>Click to edit Master title style</a:t>
             </a:r>
             <a:endParaRPr lang="en-US" dirty="0"/>
@@ -1065,7 +1121,7 @@
           <a:p>
             <a:pPr lvl="0"/>
             <a:r>
-              <a:rPr lang="en-US" smtClean="0"/>
+              <a:rPr lang="en-US"/>
               <a:t>Click to edit Master text styles</a:t>
             </a:r>
           </a:p>
@@ -1088,7 +1144,7 @@
           <a:p>
             <a:fld id="{F2A8A90E-0BBF-4AA7-9155-7B1E9439A4DB}" type="datetimeFigureOut">
               <a:rPr lang="en-US" smtClean="0"/>
-              <a:t>2/13/2025</a:t>
+              <a:t>7/8/2026</a:t>
             </a:fld>
             <a:endParaRPr lang="en-US"/>
           </a:p>
@@ -1193,7 +1249,7 @@
           </a:lstStyle>
           <a:p>
             <a:r>
-              <a:rPr lang="en-US" smtClean="0"/>
+              <a:rPr lang="en-US"/>
               <a:t>Click to edit Master title style</a:t>
             </a:r>
             <a:endParaRPr lang="en-US" dirty="0"/>
@@ -1257,7 +1313,7 @@
           <a:p>
             <a:pPr lvl="0"/>
             <a:r>
-              <a:rPr lang="en-US" smtClean="0"/>
+              <a:rPr lang="en-US"/>
               <a:t>Click to edit Master text styles</a:t>
             </a:r>
           </a:p>
@@ -1379,7 +1435,7 @@
           <a:p>
             <a:pPr lvl="0"/>
             <a:r>
-              <a:rPr lang="en-US" smtClean="0"/>
+              <a:rPr lang="en-US"/>
               <a:t>Click to edit Master text styles</a:t>
             </a:r>
           </a:p>
@@ -1402,7 +1458,7 @@
           <a:p>
             <a:fld id="{F2A8A90E-0BBF-4AA7-9155-7B1E9439A4DB}" type="datetimeFigureOut">
               <a:rPr lang="en-US" smtClean="0"/>
-              <a:t>2/13/2025</a:t>
+              <a:t>7/8/2026</a:t>
             </a:fld>
             <a:endParaRPr lang="en-US"/>
           </a:p>
@@ -1597,7 +1653,7 @@
           </a:lstStyle>
           <a:p>
             <a:r>
-              <a:rPr lang="en-US" smtClean="0"/>
+              <a:rPr lang="en-US"/>
               <a:t>Click to edit Master title style</a:t>
             </a:r>
             <a:endParaRPr lang="en-US" dirty="0"/>
@@ -1720,7 +1776,7 @@
           <a:p>
             <a:pPr lvl="0"/>
             <a:r>
-              <a:rPr lang="en-US" smtClean="0"/>
+              <a:rPr lang="en-US"/>
               <a:t>Click to edit Master text styles</a:t>
             </a:r>
           </a:p>
@@ -1743,7 +1799,7 @@
           <a:p>
             <a:fld id="{F2A8A90E-0BBF-4AA7-9155-7B1E9439A4DB}" type="datetimeFigureOut">
               <a:rPr lang="en-US" smtClean="0"/>
-              <a:t>2/13/2025</a:t>
+              <a:t>7/8/2026</a:t>
             </a:fld>
             <a:endParaRPr lang="en-US"/>
           </a:p>
@@ -1848,7 +1904,7 @@
           </a:lstStyle>
           <a:p>
             <a:r>
-              <a:rPr lang="en-US" smtClean="0"/>
+              <a:rPr lang="en-US"/>
               <a:t>Click to edit Master title style</a:t>
             </a:r>
             <a:endParaRPr lang="en-US" dirty="0"/>
@@ -1912,7 +1968,7 @@
           <a:p>
             <a:pPr lvl="0"/>
             <a:r>
-              <a:rPr lang="en-US" smtClean="0"/>
+              <a:rPr lang="en-US"/>
               <a:t>Click to edit Master text styles</a:t>
             </a:r>
           </a:p>
@@ -2034,7 +2090,7 @@
           <a:p>
             <a:pPr lvl="0"/>
             <a:r>
-              <a:rPr lang="en-US" smtClean="0"/>
+              <a:rPr lang="en-US"/>
               <a:t>Click to edit Master text styles</a:t>
             </a:r>
           </a:p>
@@ -2057,7 +2113,7 @@
           <a:p>
             <a:fld id="{F2A8A90E-0BBF-4AA7-9155-7B1E9439A4DB}" type="datetimeFigureOut">
               <a:rPr lang="en-US" smtClean="0"/>
-              <a:t>2/13/2025</a:t>
+              <a:t>7/8/2026</a:t>
             </a:fld>
             <a:endParaRPr lang="en-US"/>
           </a:p>
@@ -2244,7 +2300,7 @@
           </a:lstStyle>
           <a:p>
             <a:r>
-              <a:rPr lang="en-US" smtClean="0"/>
+              <a:rPr lang="en-US"/>
               <a:t>Click to edit Master title style</a:t>
             </a:r>
             <a:endParaRPr lang="en-US" dirty="0"/>
@@ -2305,7 +2361,7 @@
           <a:p>
             <a:pPr lvl="0"/>
             <a:r>
-              <a:rPr lang="en-US" smtClean="0"/>
+              <a:rPr lang="en-US"/>
               <a:t>Click to edit Master text styles</a:t>
             </a:r>
           </a:p>
@@ -2427,7 +2483,7 @@
           <a:p>
             <a:pPr lvl="0"/>
             <a:r>
-              <a:rPr lang="en-US" smtClean="0"/>
+              <a:rPr lang="en-US"/>
               <a:t>Click to edit Master text styles</a:t>
             </a:r>
           </a:p>
@@ -2450,7 +2506,7 @@
           <a:p>
             <a:fld id="{F2A8A90E-0BBF-4AA7-9155-7B1E9439A4DB}" type="datetimeFigureOut">
               <a:rPr lang="en-US" smtClean="0"/>
-              <a:t>2/13/2025</a:t>
+              <a:t>7/8/2026</a:t>
             </a:fld>
             <a:endParaRPr lang="en-US"/>
           </a:p>
@@ -2544,7 +2600,7 @@
           <a:lstStyle/>
           <a:p>
             <a:r>
-              <a:rPr lang="en-US" smtClean="0"/>
+              <a:rPr lang="en-US"/>
               <a:t>Click to edit Master title style</a:t>
             </a:r>
             <a:endParaRPr lang="en-US" dirty="0"/>
@@ -2568,35 +2624,35 @@
           <a:p>
             <a:pPr lvl="0"/>
             <a:r>
-              <a:rPr lang="en-US" smtClean="0"/>
+              <a:rPr lang="en-US"/>
               <a:t>Click to edit Master text styles</a:t>
             </a:r>
           </a:p>
           <a:p>
             <a:pPr lvl="1"/>
             <a:r>
-              <a:rPr lang="en-US" smtClean="0"/>
+              <a:rPr lang="en-US"/>
               <a:t>Second level</a:t>
             </a:r>
           </a:p>
           <a:p>
             <a:pPr lvl="2"/>
             <a:r>
-              <a:rPr lang="en-US" smtClean="0"/>
+              <a:rPr lang="en-US"/>
               <a:t>Third level</a:t>
             </a:r>
           </a:p>
           <a:p>
             <a:pPr lvl="3"/>
             <a:r>
-              <a:rPr lang="en-US" smtClean="0"/>
+              <a:rPr lang="en-US"/>
               <a:t>Fourth level</a:t>
             </a:r>
           </a:p>
           <a:p>
             <a:pPr lvl="4"/>
             <a:r>
-              <a:rPr lang="en-US" smtClean="0"/>
+              <a:rPr lang="en-US"/>
               <a:t>Fifth level</a:t>
             </a:r>
             <a:endParaRPr lang="en-US" dirty="0"/>
@@ -2620,7 +2676,7 @@
           <a:p>
             <a:fld id="{F2A8A90E-0BBF-4AA7-9155-7B1E9439A4DB}" type="datetimeFigureOut">
               <a:rPr lang="en-US" smtClean="0"/>
-              <a:t>2/13/2025</a:t>
+              <a:t>7/8/2026</a:t>
             </a:fld>
             <a:endParaRPr lang="en-US"/>
           </a:p>
@@ -2719,7 +2775,7 @@
           <a:lstStyle/>
           <a:p>
             <a:r>
-              <a:rPr lang="en-US" smtClean="0"/>
+              <a:rPr lang="en-US"/>
               <a:t>Click to edit Master title style</a:t>
             </a:r>
             <a:endParaRPr lang="en-US" dirty="0"/>
@@ -2748,35 +2804,35 @@
           <a:p>
             <a:pPr lvl="0"/>
             <a:r>
-              <a:rPr lang="en-US" smtClean="0"/>
+              <a:rPr lang="en-US"/>
               <a:t>Click to edit Master text styles</a:t>
             </a:r>
           </a:p>
           <a:p>
             <a:pPr lvl="1"/>
             <a:r>
-              <a:rPr lang="en-US" smtClean="0"/>
+              <a:rPr lang="en-US"/>
               <a:t>Second level</a:t>
             </a:r>
           </a:p>
           <a:p>
             <a:pPr lvl="2"/>
             <a:r>
-              <a:rPr lang="en-US" smtClean="0"/>
+              <a:rPr lang="en-US"/>
               <a:t>Third level</a:t>
             </a:r>
           </a:p>
           <a:p>
             <a:pPr lvl="3"/>
             <a:r>
-              <a:rPr lang="en-US" smtClean="0"/>
+              <a:rPr lang="en-US"/>
               <a:t>Fourth level</a:t>
             </a:r>
           </a:p>
           <a:p>
             <a:pPr lvl="4"/>
             <a:r>
-              <a:rPr lang="en-US" smtClean="0"/>
+              <a:rPr lang="en-US"/>
               <a:t>Fifth level</a:t>
             </a:r>
             <a:endParaRPr lang="en-US" dirty="0"/>
@@ -2800,7 +2856,7 @@
           <a:p>
             <a:fld id="{F2A8A90E-0BBF-4AA7-9155-7B1E9439A4DB}" type="datetimeFigureOut">
               <a:rPr lang="en-US" smtClean="0"/>
-              <a:t>2/13/2025</a:t>
+              <a:t>7/8/2026</a:t>
             </a:fld>
             <a:endParaRPr lang="en-US"/>
           </a:p>
@@ -2900,7 +2956,7 @@
           </a:lstStyle>
           <a:p>
             <a:r>
-              <a:rPr lang="en-US" smtClean="0"/>
+              <a:rPr lang="en-US"/>
               <a:t>Click to edit Master title style</a:t>
             </a:r>
             <a:endParaRPr lang="en-US" dirty="0"/>
@@ -2924,35 +2980,35 @@
           <a:p>
             <a:pPr lvl="0"/>
             <a:r>
-              <a:rPr lang="en-US" smtClean="0"/>
+              <a:rPr lang="en-US"/>
               <a:t>Click to edit Master text styles</a:t>
             </a:r>
           </a:p>
           <a:p>
             <a:pPr lvl="1"/>
             <a:r>
-              <a:rPr lang="en-US" smtClean="0"/>
+              <a:rPr lang="en-US"/>
               <a:t>Second level</a:t>
             </a:r>
           </a:p>
           <a:p>
             <a:pPr lvl="2"/>
             <a:r>
-              <a:rPr lang="en-US" smtClean="0"/>
+              <a:rPr lang="en-US"/>
               <a:t>Third level</a:t>
             </a:r>
           </a:p>
           <a:p>
             <a:pPr lvl="3"/>
             <a:r>
-              <a:rPr lang="en-US" smtClean="0"/>
+              <a:rPr lang="en-US"/>
               <a:t>Fourth level</a:t>
             </a:r>
           </a:p>
           <a:p>
             <a:pPr lvl="4"/>
             <a:r>
-              <a:rPr lang="en-US" smtClean="0"/>
+              <a:rPr lang="en-US"/>
               <a:t>Fifth level</a:t>
             </a:r>
             <a:endParaRPr lang="en-US" dirty="0"/>
@@ -2976,7 +3032,7 @@
           <a:p>
             <a:fld id="{F2A8A90E-0BBF-4AA7-9155-7B1E9439A4DB}" type="datetimeFigureOut">
               <a:rPr lang="en-US" smtClean="0"/>
-              <a:t>2/13/2025</a:t>
+              <a:t>7/8/2026</a:t>
             </a:fld>
             <a:endParaRPr lang="en-US"/>
           </a:p>
@@ -3079,7 +3135,7 @@
           </a:lstStyle>
           <a:p>
             <a:r>
-              <a:rPr lang="en-US" smtClean="0"/>
+              <a:rPr lang="en-US"/>
               <a:t>Click to edit Master title style</a:t>
             </a:r>
             <a:endParaRPr lang="en-US" dirty="0"/>
@@ -3200,7 +3256,7 @@
           <a:p>
             <a:pPr lvl="0"/>
             <a:r>
-              <a:rPr lang="en-US" smtClean="0"/>
+              <a:rPr lang="en-US"/>
               <a:t>Click to edit Master text styles</a:t>
             </a:r>
           </a:p>
@@ -3223,7 +3279,7 @@
           <a:p>
             <a:fld id="{F2A8A90E-0BBF-4AA7-9155-7B1E9439A4DB}" type="datetimeFigureOut">
               <a:rPr lang="en-US" smtClean="0"/>
-              <a:t>2/13/2025</a:t>
+              <a:t>7/8/2026</a:t>
             </a:fld>
             <a:endParaRPr lang="en-US"/>
           </a:p>
@@ -3317,7 +3373,7 @@
           <a:lstStyle/>
           <a:p>
             <a:r>
-              <a:rPr lang="en-US" smtClean="0"/>
+              <a:rPr lang="en-US"/>
               <a:t>Click to edit Master title style</a:t>
             </a:r>
             <a:endParaRPr lang="en-US" dirty="0"/>
@@ -3346,35 +3402,35 @@
           <a:p>
             <a:pPr lvl="0"/>
             <a:r>
-              <a:rPr lang="en-US" smtClean="0"/>
+              <a:rPr lang="en-US"/>
               <a:t>Click to edit Master text styles</a:t>
             </a:r>
           </a:p>
           <a:p>
             <a:pPr lvl="1"/>
             <a:r>
-              <a:rPr lang="en-US" smtClean="0"/>
+              <a:rPr lang="en-US"/>
               <a:t>Second level</a:t>
             </a:r>
           </a:p>
           <a:p>
             <a:pPr lvl="2"/>
             <a:r>
-              <a:rPr lang="en-US" smtClean="0"/>
+              <a:rPr lang="en-US"/>
               <a:t>Third level</a:t>
             </a:r>
           </a:p>
           <a:p>
             <a:pPr lvl="3"/>
             <a:r>
-              <a:rPr lang="en-US" smtClean="0"/>
+              <a:rPr lang="en-US"/>
               <a:t>Fourth level</a:t>
             </a:r>
           </a:p>
           <a:p>
             <a:pPr lvl="4"/>
             <a:r>
-              <a:rPr lang="en-US" smtClean="0"/>
+              <a:rPr lang="en-US"/>
               <a:t>Fifth level</a:t>
             </a:r>
             <a:endParaRPr lang="en-US" dirty="0"/>
@@ -3403,35 +3459,35 @@
           <a:p>
             <a:pPr lvl="0"/>
             <a:r>
-              <a:rPr lang="en-US" smtClean="0"/>
+              <a:rPr lang="en-US"/>
               <a:t>Click to edit Master text styles</a:t>
             </a:r>
           </a:p>
           <a:p>
             <a:pPr lvl="1"/>
             <a:r>
-              <a:rPr lang="en-US" smtClean="0"/>
+              <a:rPr lang="en-US"/>
               <a:t>Second level</a:t>
             </a:r>
           </a:p>
           <a:p>
             <a:pPr lvl="2"/>
             <a:r>
-              <a:rPr lang="en-US" smtClean="0"/>
+              <a:rPr lang="en-US"/>
               <a:t>Third level</a:t>
             </a:r>
           </a:p>
           <a:p>
             <a:pPr lvl="3"/>
             <a:r>
-              <a:rPr lang="en-US" smtClean="0"/>
+              <a:rPr lang="en-US"/>
               <a:t>Fourth level</a:t>
             </a:r>
           </a:p>
           <a:p>
             <a:pPr lvl="4"/>
             <a:r>
-              <a:rPr lang="en-US" smtClean="0"/>
+              <a:rPr lang="en-US"/>
               <a:t>Fifth level</a:t>
             </a:r>
             <a:endParaRPr lang="en-US" dirty="0"/>
@@ -3455,7 +3511,7 @@
           <a:p>
             <a:fld id="{F2A8A90E-0BBF-4AA7-9155-7B1E9439A4DB}" type="datetimeFigureOut">
               <a:rPr lang="en-US" smtClean="0"/>
-              <a:t>2/13/2025</a:t>
+              <a:t>7/8/2026</a:t>
             </a:fld>
             <a:endParaRPr lang="en-US"/>
           </a:p>
@@ -3553,7 +3609,7 @@
           </a:lstStyle>
           <a:p>
             <a:r>
-              <a:rPr lang="en-US" smtClean="0"/>
+              <a:rPr lang="en-US"/>
               <a:t>Click to edit Master title style</a:t>
             </a:r>
             <a:endParaRPr lang="en-US" dirty="0"/>
@@ -3621,7 +3677,7 @@
           <a:p>
             <a:pPr lvl="0"/>
             <a:r>
-              <a:rPr lang="en-US" smtClean="0"/>
+              <a:rPr lang="en-US"/>
               <a:t>Click to edit Master text styles</a:t>
             </a:r>
           </a:p>
@@ -3651,35 +3707,35 @@
           <a:p>
             <a:pPr lvl="0"/>
             <a:r>
-              <a:rPr lang="en-US" smtClean="0"/>
+              <a:rPr lang="en-US"/>
               <a:t>Click to edit Master text styles</a:t>
             </a:r>
           </a:p>
           <a:p>
             <a:pPr lvl="1"/>
             <a:r>
-              <a:rPr lang="en-US" smtClean="0"/>
+              <a:rPr lang="en-US"/>
               <a:t>Second level</a:t>
             </a:r>
           </a:p>
           <a:p>
             <a:pPr lvl="2"/>
             <a:r>
-              <a:rPr lang="en-US" smtClean="0"/>
+              <a:rPr lang="en-US"/>
               <a:t>Third level</a:t>
             </a:r>
           </a:p>
           <a:p>
             <a:pPr lvl="3"/>
             <a:r>
-              <a:rPr lang="en-US" smtClean="0"/>
+              <a:rPr lang="en-US"/>
               <a:t>Fourth level</a:t>
             </a:r>
           </a:p>
           <a:p>
             <a:pPr lvl="4"/>
             <a:r>
-              <a:rPr lang="en-US" smtClean="0"/>
+              <a:rPr lang="en-US"/>
               <a:t>Fifth level</a:t>
             </a:r>
             <a:endParaRPr lang="en-US" dirty="0"/>
@@ -3747,7 +3803,7 @@
           <a:p>
             <a:pPr lvl="0"/>
             <a:r>
-              <a:rPr lang="en-US" smtClean="0"/>
+              <a:rPr lang="en-US"/>
               <a:t>Click to edit Master text styles</a:t>
             </a:r>
           </a:p>
@@ -3777,35 +3833,35 @@
           <a:p>
             <a:pPr lvl="0"/>
             <a:r>
-              <a:rPr lang="en-US" smtClean="0"/>
+              <a:rPr lang="en-US"/>
               <a:t>Click to edit Master text styles</a:t>
             </a:r>
           </a:p>
           <a:p>
             <a:pPr lvl="1"/>
             <a:r>
-              <a:rPr lang="en-US" smtClean="0"/>
+              <a:rPr lang="en-US"/>
               <a:t>Second level</a:t>
             </a:r>
           </a:p>
           <a:p>
             <a:pPr lvl="2"/>
             <a:r>
-              <a:rPr lang="en-US" smtClean="0"/>
+              <a:rPr lang="en-US"/>
               <a:t>Third level</a:t>
             </a:r>
           </a:p>
           <a:p>
             <a:pPr lvl="3"/>
             <a:r>
-              <a:rPr lang="en-US" smtClean="0"/>
+              <a:rPr lang="en-US"/>
               <a:t>Fourth level</a:t>
             </a:r>
           </a:p>
           <a:p>
             <a:pPr lvl="4"/>
             <a:r>
-              <a:rPr lang="en-US" smtClean="0"/>
+              <a:rPr lang="en-US"/>
               <a:t>Fifth level</a:t>
             </a:r>
             <a:endParaRPr lang="en-US" dirty="0"/>
@@ -3829,7 +3885,7 @@
           <a:p>
             <a:fld id="{F2A8A90E-0BBF-4AA7-9155-7B1E9439A4DB}" type="datetimeFigureOut">
               <a:rPr lang="en-US" smtClean="0"/>
-              <a:t>2/13/2025</a:t>
+              <a:t>7/8/2026</a:t>
             </a:fld>
             <a:endParaRPr lang="en-US"/>
           </a:p>
@@ -3928,7 +3984,7 @@
           <a:lstStyle/>
           <a:p>
             <a:r>
-              <a:rPr lang="en-US" smtClean="0"/>
+              <a:rPr lang="en-US"/>
               <a:t>Click to edit Master title style</a:t>
             </a:r>
             <a:endParaRPr lang="en-US" dirty="0"/>
@@ -3952,7 +4008,7 @@
           <a:p>
             <a:fld id="{F2A8A90E-0BBF-4AA7-9155-7B1E9439A4DB}" type="datetimeFigureOut">
               <a:rPr lang="en-US" smtClean="0"/>
-              <a:t>2/13/2025</a:t>
+              <a:t>7/8/2026</a:t>
             </a:fld>
             <a:endParaRPr lang="en-US"/>
           </a:p>
@@ -4047,7 +4103,7 @@
           <a:p>
             <a:fld id="{F2A8A90E-0BBF-4AA7-9155-7B1E9439A4DB}" type="datetimeFigureOut">
               <a:rPr lang="en-US" smtClean="0"/>
-              <a:t>2/13/2025</a:t>
+              <a:t>7/8/2026</a:t>
             </a:fld>
             <a:endParaRPr lang="en-US"/>
           </a:p>
@@ -4152,7 +4208,7 @@
           </a:lstStyle>
           <a:p>
             <a:r>
-              <a:rPr lang="en-US" smtClean="0"/>
+              <a:rPr lang="en-US"/>
               <a:t>Click to edit Master title style</a:t>
             </a:r>
             <a:endParaRPr lang="en-US" dirty="0"/>
@@ -4183,35 +4239,35 @@
           <a:p>
             <a:pPr lvl="0"/>
             <a:r>
-              <a:rPr lang="en-US" smtClean="0"/>
+              <a:rPr lang="en-US"/>
               <a:t>Click to edit Master text styles</a:t>
             </a:r>
           </a:p>
           <a:p>
             <a:pPr lvl="1"/>
             <a:r>
-              <a:rPr lang="en-US" smtClean="0"/>
+              <a:rPr lang="en-US"/>
               <a:t>Second level</a:t>
             </a:r>
           </a:p>
           <a:p>
             <a:pPr lvl="2"/>
             <a:r>
-              <a:rPr lang="en-US" smtClean="0"/>
+              <a:rPr lang="en-US"/>
               <a:t>Third level</a:t>
             </a:r>
           </a:p>
           <a:p>
             <a:pPr lvl="3"/>
             <a:r>
-              <a:rPr lang="en-US" smtClean="0"/>
+              <a:rPr lang="en-US"/>
               <a:t>Fourth level</a:t>
             </a:r>
           </a:p>
           <a:p>
             <a:pPr lvl="4"/>
             <a:r>
-              <a:rPr lang="en-US" smtClean="0"/>
+              <a:rPr lang="en-US"/>
               <a:t>Fifth level</a:t>
             </a:r>
             <a:endParaRPr lang="en-US" dirty="0"/>
@@ -4279,7 +4335,7 @@
           <a:p>
             <a:pPr lvl="0"/>
             <a:r>
-              <a:rPr lang="en-US" smtClean="0"/>
+              <a:rPr lang="en-US"/>
               <a:t>Click to edit Master text styles</a:t>
             </a:r>
           </a:p>
@@ -4302,7 +4358,7 @@
           <a:p>
             <a:fld id="{F2A8A90E-0BBF-4AA7-9155-7B1E9439A4DB}" type="datetimeFigureOut">
               <a:rPr lang="en-US" smtClean="0"/>
-              <a:t>2/13/2025</a:t>
+              <a:t>7/8/2026</a:t>
             </a:fld>
             <a:endParaRPr lang="en-US"/>
           </a:p>
@@ -4407,7 +4463,7 @@
           </a:lstStyle>
           <a:p>
             <a:r>
-              <a:rPr lang="en-US" smtClean="0"/>
+              <a:rPr lang="en-US"/>
               <a:t>Click to edit Master title style</a:t>
             </a:r>
             <a:endParaRPr lang="en-US" dirty="0"/>
@@ -4474,7 +4530,7 @@
           </a:lstStyle>
           <a:p>
             <a:r>
-              <a:rPr lang="en-US" smtClean="0"/>
+              <a:rPr lang="en-US"/>
               <a:t>Click icon to add picture</a:t>
             </a:r>
             <a:endParaRPr lang="en-US" dirty="0"/>
@@ -4542,7 +4598,7 @@
           <a:p>
             <a:pPr lvl="0"/>
             <a:r>
-              <a:rPr lang="en-US" smtClean="0"/>
+              <a:rPr lang="en-US"/>
               <a:t>Click to edit Master text styles</a:t>
             </a:r>
           </a:p>
@@ -4565,7 +4621,7 @@
           <a:p>
             <a:fld id="{F2A8A90E-0BBF-4AA7-9155-7B1E9439A4DB}" type="datetimeFigureOut">
               <a:rPr lang="en-US" smtClean="0"/>
-              <a:t>2/13/2025</a:t>
+              <a:t>7/8/2026</a:t>
             </a:fld>
             <a:endParaRPr lang="en-US"/>
           </a:p>
@@ -4798,6 +4854,13 @@
               <a:schemeClr val="lt1"/>
             </a:fontRef>
           </p:style>
+          <p:txBody>
+            <a:bodyPr/>
+            <a:lstStyle/>
+            <a:p>
+              <a:endParaRPr lang="en-US"/>
+            </a:p>
+          </p:txBody>
         </p:sp>
         <p:sp>
           <p:nvSpPr>
@@ -4861,6 +4924,13 @@
               <a:schemeClr val="lt1"/>
             </a:fontRef>
           </p:style>
+          <p:txBody>
+            <a:bodyPr/>
+            <a:lstStyle/>
+            <a:p>
+              <a:endParaRPr lang="en-US"/>
+            </a:p>
+          </p:txBody>
         </p:sp>
         <p:sp>
           <p:nvSpPr>
@@ -4902,6 +4972,13 @@
               <a:schemeClr val="lt1"/>
             </a:fontRef>
           </p:style>
+          <p:txBody>
+            <a:bodyPr/>
+            <a:lstStyle/>
+            <a:p>
+              <a:endParaRPr lang="en-US"/>
+            </a:p>
+          </p:txBody>
         </p:sp>
         <p:sp>
           <p:nvSpPr>
@@ -4966,6 +5043,13 @@
               <a:schemeClr val="lt1"/>
             </a:fontRef>
           </p:style>
+          <p:txBody>
+            <a:bodyPr/>
+            <a:lstStyle/>
+            <a:p>
+              <a:endParaRPr lang="en-US"/>
+            </a:p>
+          </p:txBody>
         </p:sp>
         <p:sp>
           <p:nvSpPr>
@@ -5031,6 +5115,13 @@
               <a:schemeClr val="lt1"/>
             </a:fontRef>
           </p:style>
+          <p:txBody>
+            <a:bodyPr/>
+            <a:lstStyle/>
+            <a:p>
+              <a:endParaRPr lang="en-US"/>
+            </a:p>
+          </p:txBody>
         </p:sp>
         <p:sp>
           <p:nvSpPr>
@@ -5094,6 +5185,13 @@
               <a:schemeClr val="lt1"/>
             </a:fontRef>
           </p:style>
+          <p:txBody>
+            <a:bodyPr/>
+            <a:lstStyle/>
+            <a:p>
+              <a:endParaRPr lang="en-US"/>
+            </a:p>
+          </p:txBody>
         </p:sp>
         <p:sp>
           <p:nvSpPr>
@@ -5135,6 +5233,13 @@
               <a:schemeClr val="lt1"/>
             </a:fontRef>
           </p:style>
+          <p:txBody>
+            <a:bodyPr/>
+            <a:lstStyle/>
+            <a:p>
+              <a:endParaRPr lang="en-US"/>
+            </a:p>
+          </p:txBody>
         </p:sp>
         <p:sp>
           <p:nvSpPr>
@@ -5176,6 +5281,13 @@
               <a:schemeClr val="lt1"/>
             </a:fontRef>
           </p:style>
+          <p:txBody>
+            <a:bodyPr/>
+            <a:lstStyle/>
+            <a:p>
+              <a:endParaRPr lang="en-US"/>
+            </a:p>
+          </p:txBody>
         </p:sp>
       </p:grpSp>
       <p:sp>
@@ -5204,7 +5316,7 @@
           <a:lstStyle/>
           <a:p>
             <a:r>
-              <a:rPr lang="en-US" smtClean="0"/>
+              <a:rPr lang="en-US"/>
               <a:t>Click to edit Master title style</a:t>
             </a:r>
             <a:endParaRPr lang="en-US" dirty="0"/>
@@ -5238,35 +5350,35 @@
           <a:p>
             <a:pPr lvl="0"/>
             <a:r>
-              <a:rPr lang="en-US" smtClean="0"/>
+              <a:rPr lang="en-US"/>
               <a:t>Click to edit Master text styles</a:t>
             </a:r>
           </a:p>
           <a:p>
             <a:pPr lvl="1"/>
             <a:r>
-              <a:rPr lang="en-US" smtClean="0"/>
+              <a:rPr lang="en-US"/>
               <a:t>Second level</a:t>
             </a:r>
           </a:p>
           <a:p>
             <a:pPr lvl="2"/>
             <a:r>
-              <a:rPr lang="en-US" smtClean="0"/>
+              <a:rPr lang="en-US"/>
               <a:t>Third level</a:t>
             </a:r>
           </a:p>
           <a:p>
             <a:pPr lvl="3"/>
             <a:r>
-              <a:rPr lang="en-US" smtClean="0"/>
+              <a:rPr lang="en-US"/>
               <a:t>Fourth level</a:t>
             </a:r>
           </a:p>
           <a:p>
             <a:pPr lvl="4"/>
             <a:r>
-              <a:rPr lang="en-US" smtClean="0"/>
+              <a:rPr lang="en-US"/>
               <a:t>Fifth level</a:t>
             </a:r>
             <a:endParaRPr lang="en-US" dirty="0"/>
@@ -5308,7 +5420,7 @@
           <a:p>
             <a:fld id="{F2A8A90E-0BBF-4AA7-9155-7B1E9439A4DB}" type="datetimeFigureOut">
               <a:rPr lang="en-US" smtClean="0"/>
-              <a:t>2/13/2025</a:t>
+              <a:t>7/8/2026</a:t>
             </a:fld>
             <a:endParaRPr lang="en-US"/>
           </a:p>
@@ -5855,14 +5967,14 @@
           <a:lstStyle/>
           <a:p>
             <a:r>
-              <a:rPr lang="en-US" sz="3200" dirty="0" err="1" smtClean="0">
+              <a:rPr lang="en-US" sz="3200" dirty="0" err="1">
                 <a:latin typeface="Arial" panose="020B0604020202020204" pitchFamily="34" charset="0"/>
                 <a:cs typeface="Arial" panose="020B0604020202020204" pitchFamily="34" charset="0"/>
               </a:rPr>
               <a:t>Kiếm</a:t>
             </a:r>
             <a:r>
-              <a:rPr lang="en-US" sz="3200" dirty="0" smtClean="0">
+              <a:rPr lang="en-US" sz="3200" dirty="0">
                 <a:latin typeface="Arial" panose="020B0604020202020204" pitchFamily="34" charset="0"/>
                 <a:cs typeface="Arial" panose="020B0604020202020204" pitchFamily="34" charset="0"/>
               </a:rPr>
@@ -5873,14 +5985,7 @@
                 <a:latin typeface="Arial" panose="020B0604020202020204" pitchFamily="34" charset="0"/>
                 <a:cs typeface="Arial" panose="020B0604020202020204" pitchFamily="34" charset="0"/>
               </a:rPr>
-              <a:t>T</a:t>
-            </a:r>
-            <a:r>
-              <a:rPr lang="en-US" sz="3200" dirty="0" err="1" smtClean="0">
-                <a:latin typeface="Arial" panose="020B0604020202020204" pitchFamily="34" charset="0"/>
-                <a:cs typeface="Arial" panose="020B0604020202020204" pitchFamily="34" charset="0"/>
-              </a:rPr>
-              <a:t>iền</a:t>
+              <a:t>Tiền</a:t>
             </a:r>
             <a:endParaRPr lang="en-US" sz="3200" dirty="0">
               <a:latin typeface="Arial" panose="020B0604020202020204" pitchFamily="34" charset="0"/>
@@ -5926,49 +6031,49 @@
           <a:p>
             <a:pPr algn="ctr"/>
             <a:r>
-              <a:rPr lang="en-US" dirty="0" err="1" smtClean="0">
+              <a:rPr lang="en-US" dirty="0" err="1">
                 <a:latin typeface="Arial" panose="020B0604020202020204" pitchFamily="34" charset="0"/>
                 <a:cs typeface="Arial" panose="020B0604020202020204" pitchFamily="34" charset="0"/>
               </a:rPr>
               <a:t>Bán</a:t>
             </a:r>
             <a:r>
-              <a:rPr lang="en-US" dirty="0" smtClean="0">
+              <a:rPr lang="en-US" dirty="0">
                 <a:latin typeface="Arial" panose="020B0604020202020204" pitchFamily="34" charset="0"/>
                 <a:cs typeface="Arial" panose="020B0604020202020204" pitchFamily="34" charset="0"/>
               </a:rPr>
               <a:t> </a:t>
             </a:r>
             <a:r>
-              <a:rPr lang="en-US" dirty="0" err="1" smtClean="0">
+              <a:rPr lang="en-US" dirty="0" err="1">
                 <a:latin typeface="Arial" panose="020B0604020202020204" pitchFamily="34" charset="0"/>
                 <a:cs typeface="Arial" panose="020B0604020202020204" pitchFamily="34" charset="0"/>
               </a:rPr>
               <a:t>sức</a:t>
             </a:r>
             <a:r>
-              <a:rPr lang="en-US" dirty="0" smtClean="0">
+              <a:rPr lang="en-US" dirty="0">
                 <a:latin typeface="Arial" panose="020B0604020202020204" pitchFamily="34" charset="0"/>
                 <a:cs typeface="Arial" panose="020B0604020202020204" pitchFamily="34" charset="0"/>
               </a:rPr>
               <a:t> </a:t>
             </a:r>
             <a:r>
-              <a:rPr lang="en-US" dirty="0" err="1" smtClean="0">
+              <a:rPr lang="en-US" dirty="0" err="1">
                 <a:latin typeface="Arial" panose="020B0604020202020204" pitchFamily="34" charset="0"/>
                 <a:cs typeface="Arial" panose="020B0604020202020204" pitchFamily="34" charset="0"/>
               </a:rPr>
               <a:t>lao</a:t>
             </a:r>
             <a:r>
-              <a:rPr lang="en-US" dirty="0" smtClean="0">
+              <a:rPr lang="en-US" dirty="0">
                 <a:latin typeface="Arial" panose="020B0604020202020204" pitchFamily="34" charset="0"/>
                 <a:cs typeface="Arial" panose="020B0604020202020204" pitchFamily="34" charset="0"/>
               </a:rPr>
               <a:t> </a:t>
             </a:r>
             <a:r>
-              <a:rPr lang="en-US" dirty="0" err="1" smtClean="0">
+              <a:rPr lang="en-US" dirty="0" err="1">
                 <a:latin typeface="Arial" panose="020B0604020202020204" pitchFamily="34" charset="0"/>
                 <a:cs typeface="Arial" panose="020B0604020202020204" pitchFamily="34" charset="0"/>
               </a:rPr>
@@ -6018,63 +6123,63 @@
           <a:p>
             <a:pPr algn="ctr"/>
             <a:r>
-              <a:rPr lang="en-US" dirty="0" err="1" smtClean="0">
+              <a:rPr lang="en-US" dirty="0" err="1">
                 <a:latin typeface="Arial" panose="020B0604020202020204" pitchFamily="34" charset="0"/>
                 <a:cs typeface="Arial" panose="020B0604020202020204" pitchFamily="34" charset="0"/>
               </a:rPr>
               <a:t>Bán</a:t>
             </a:r>
             <a:r>
-              <a:rPr lang="en-US" dirty="0" smtClean="0">
+              <a:rPr lang="en-US" dirty="0">
                 <a:latin typeface="Arial" panose="020B0604020202020204" pitchFamily="34" charset="0"/>
                 <a:cs typeface="Arial" panose="020B0604020202020204" pitchFamily="34" charset="0"/>
               </a:rPr>
               <a:t> </a:t>
             </a:r>
             <a:r>
-              <a:rPr lang="en-US" dirty="0" err="1" smtClean="0">
+              <a:rPr lang="en-US" dirty="0" err="1">
                 <a:latin typeface="Arial" panose="020B0604020202020204" pitchFamily="34" charset="0"/>
                 <a:cs typeface="Arial" panose="020B0604020202020204" pitchFamily="34" charset="0"/>
               </a:rPr>
               <a:t>kiến</a:t>
             </a:r>
             <a:r>
-              <a:rPr lang="en-US" dirty="0" smtClean="0">
+              <a:rPr lang="en-US" dirty="0">
                 <a:latin typeface="Arial" panose="020B0604020202020204" pitchFamily="34" charset="0"/>
                 <a:cs typeface="Arial" panose="020B0604020202020204" pitchFamily="34" charset="0"/>
               </a:rPr>
               <a:t> </a:t>
             </a:r>
             <a:r>
-              <a:rPr lang="en-US" dirty="0" err="1" smtClean="0">
+              <a:rPr lang="en-US" dirty="0" err="1">
                 <a:latin typeface="Arial" panose="020B0604020202020204" pitchFamily="34" charset="0"/>
                 <a:cs typeface="Arial" panose="020B0604020202020204" pitchFamily="34" charset="0"/>
               </a:rPr>
               <a:t>thức</a:t>
             </a:r>
             <a:r>
-              <a:rPr lang="en-US" dirty="0" smtClean="0">
+              <a:rPr lang="en-US" dirty="0">
                 <a:latin typeface="Arial" panose="020B0604020202020204" pitchFamily="34" charset="0"/>
                 <a:cs typeface="Arial" panose="020B0604020202020204" pitchFamily="34" charset="0"/>
               </a:rPr>
               <a:t> </a:t>
             </a:r>
             <a:r>
-              <a:rPr lang="en-US" dirty="0" err="1" smtClean="0">
+              <a:rPr lang="en-US" dirty="0" err="1">
                 <a:latin typeface="Arial" panose="020B0604020202020204" pitchFamily="34" charset="0"/>
                 <a:cs typeface="Arial" panose="020B0604020202020204" pitchFamily="34" charset="0"/>
               </a:rPr>
               <a:t>kĩ</a:t>
             </a:r>
             <a:r>
-              <a:rPr lang="en-US" dirty="0" smtClean="0">
+              <a:rPr lang="en-US" dirty="0">
                 <a:latin typeface="Arial" panose="020B0604020202020204" pitchFamily="34" charset="0"/>
                 <a:cs typeface="Arial" panose="020B0604020202020204" pitchFamily="34" charset="0"/>
               </a:rPr>
               <a:t> </a:t>
             </a:r>
             <a:r>
-              <a:rPr lang="en-US" dirty="0" err="1" smtClean="0">
+              <a:rPr lang="en-US" dirty="0" err="1">
                 <a:latin typeface="Arial" panose="020B0604020202020204" pitchFamily="34" charset="0"/>
                 <a:cs typeface="Arial" panose="020B0604020202020204" pitchFamily="34" charset="0"/>
               </a:rPr>
@@ -6124,35 +6229,35 @@
           <a:p>
             <a:pPr algn="ctr"/>
             <a:r>
-              <a:rPr lang="en-US" dirty="0" err="1" smtClean="0">
+              <a:rPr lang="en-US" dirty="0" err="1">
                 <a:latin typeface="Arial" panose="020B0604020202020204" pitchFamily="34" charset="0"/>
                 <a:cs typeface="Arial" panose="020B0604020202020204" pitchFamily="34" charset="0"/>
               </a:rPr>
               <a:t>Mở</a:t>
             </a:r>
             <a:r>
-              <a:rPr lang="en-US" dirty="0" smtClean="0">
+              <a:rPr lang="en-US" dirty="0">
                 <a:latin typeface="Arial" panose="020B0604020202020204" pitchFamily="34" charset="0"/>
                 <a:cs typeface="Arial" panose="020B0604020202020204" pitchFamily="34" charset="0"/>
               </a:rPr>
               <a:t> </a:t>
             </a:r>
             <a:r>
-              <a:rPr lang="en-US" dirty="0" err="1" smtClean="0">
+              <a:rPr lang="en-US" dirty="0" err="1">
                 <a:latin typeface="Arial" panose="020B0604020202020204" pitchFamily="34" charset="0"/>
                 <a:cs typeface="Arial" panose="020B0604020202020204" pitchFamily="34" charset="0"/>
               </a:rPr>
               <a:t>doanh</a:t>
             </a:r>
             <a:r>
-              <a:rPr lang="en-US" dirty="0" smtClean="0">
+              <a:rPr lang="en-US" dirty="0">
                 <a:latin typeface="Arial" panose="020B0604020202020204" pitchFamily="34" charset="0"/>
                 <a:cs typeface="Arial" panose="020B0604020202020204" pitchFamily="34" charset="0"/>
               </a:rPr>
               <a:t> </a:t>
             </a:r>
             <a:r>
-              <a:rPr lang="en-US" dirty="0" err="1" smtClean="0">
+              <a:rPr lang="en-US" dirty="0" err="1">
                 <a:latin typeface="Arial" panose="020B0604020202020204" pitchFamily="34" charset="0"/>
                 <a:cs typeface="Arial" panose="020B0604020202020204" pitchFamily="34" charset="0"/>
               </a:rPr>
@@ -6202,21 +6307,21 @@
           <a:p>
             <a:pPr algn="ctr"/>
             <a:r>
-              <a:rPr lang="en-US" dirty="0" err="1" smtClean="0">
+              <a:rPr lang="en-US" dirty="0" err="1">
                 <a:latin typeface="Arial" panose="020B0604020202020204" pitchFamily="34" charset="0"/>
                 <a:cs typeface="Arial" panose="020B0604020202020204" pitchFamily="34" charset="0"/>
               </a:rPr>
               <a:t>Đầu</a:t>
             </a:r>
             <a:r>
-              <a:rPr lang="en-US" dirty="0" smtClean="0">
+              <a:rPr lang="en-US" dirty="0">
                 <a:latin typeface="Arial" panose="020B0604020202020204" pitchFamily="34" charset="0"/>
                 <a:cs typeface="Arial" panose="020B0604020202020204" pitchFamily="34" charset="0"/>
               </a:rPr>
               <a:t> </a:t>
             </a:r>
             <a:r>
-              <a:rPr lang="en-US" dirty="0" err="1" smtClean="0">
+              <a:rPr lang="en-US" dirty="0" err="1">
                 <a:latin typeface="Arial" panose="020B0604020202020204" pitchFamily="34" charset="0"/>
                 <a:cs typeface="Arial" panose="020B0604020202020204" pitchFamily="34" charset="0"/>
               </a:rPr>
@@ -6239,13 +6344,6 @@
   <p:clrMapOvr>
     <a:masterClrMapping/>
   </p:clrMapOvr>
-  <p:timing>
-    <p:tnLst>
-      <p:par>
-        <p:cTn id="1" dur="indefinite" restart="never" nodeType="tmRoot"/>
-      </p:par>
-    </p:tnLst>
-  </p:timing>
 </p:sld>
 </file>
 
@@ -6289,21 +6387,21 @@
           <a:lstStyle/>
           <a:p>
             <a:r>
-              <a:rPr lang="en-US" sz="3200" dirty="0" err="1" smtClean="0">
+              <a:rPr lang="en-US" sz="3200" dirty="0" err="1">
                 <a:latin typeface="Arial" panose="020B0604020202020204" pitchFamily="34" charset="0"/>
                 <a:cs typeface="Arial" panose="020B0604020202020204" pitchFamily="34" charset="0"/>
               </a:rPr>
               <a:t>Giữ</a:t>
             </a:r>
             <a:r>
-              <a:rPr lang="en-US" sz="3200" dirty="0" smtClean="0">
+              <a:rPr lang="en-US" sz="3200" dirty="0">
                 <a:latin typeface="Arial" panose="020B0604020202020204" pitchFamily="34" charset="0"/>
                 <a:cs typeface="Arial" panose="020B0604020202020204" pitchFamily="34" charset="0"/>
               </a:rPr>
               <a:t> </a:t>
             </a:r>
             <a:r>
-              <a:rPr lang="en-US" sz="3200" dirty="0" err="1" smtClean="0">
+              <a:rPr lang="en-US" sz="3200" dirty="0" err="1">
                 <a:latin typeface="Arial" panose="020B0604020202020204" pitchFamily="34" charset="0"/>
                 <a:cs typeface="Arial" panose="020B0604020202020204" pitchFamily="34" charset="0"/>
               </a:rPr>
@@ -6353,49 +6451,49 @@
           <a:p>
             <a:pPr algn="ctr"/>
             <a:r>
-              <a:rPr lang="en-US" dirty="0" err="1" smtClean="0">
+              <a:rPr lang="en-US" dirty="0" err="1">
                 <a:latin typeface="Arial" panose="020B0604020202020204" pitchFamily="34" charset="0"/>
                 <a:cs typeface="Arial" panose="020B0604020202020204" pitchFamily="34" charset="0"/>
               </a:rPr>
               <a:t>Giữ</a:t>
             </a:r>
             <a:r>
-              <a:rPr lang="en-US" dirty="0" smtClean="0">
+              <a:rPr lang="en-US" dirty="0">
                 <a:latin typeface="Arial" panose="020B0604020202020204" pitchFamily="34" charset="0"/>
                 <a:cs typeface="Arial" panose="020B0604020202020204" pitchFamily="34" charset="0"/>
               </a:rPr>
               <a:t> </a:t>
             </a:r>
             <a:r>
-              <a:rPr lang="en-US" dirty="0" err="1" smtClean="0">
+              <a:rPr lang="en-US" dirty="0" err="1">
                 <a:latin typeface="Arial" panose="020B0604020202020204" pitchFamily="34" charset="0"/>
                 <a:cs typeface="Arial" panose="020B0604020202020204" pitchFamily="34" charset="0"/>
               </a:rPr>
               <a:t>trước</a:t>
             </a:r>
             <a:r>
-              <a:rPr lang="en-US" dirty="0" smtClean="0">
+              <a:rPr lang="en-US" dirty="0">
                 <a:latin typeface="Arial" panose="020B0604020202020204" pitchFamily="34" charset="0"/>
                 <a:cs typeface="Arial" panose="020B0604020202020204" pitchFamily="34" charset="0"/>
               </a:rPr>
               <a:t> </a:t>
             </a:r>
             <a:r>
-              <a:rPr lang="en-US" dirty="0" err="1" smtClean="0">
+              <a:rPr lang="en-US" dirty="0" err="1">
                 <a:latin typeface="Arial" panose="020B0604020202020204" pitchFamily="34" charset="0"/>
                 <a:cs typeface="Arial" panose="020B0604020202020204" pitchFamily="34" charset="0"/>
               </a:rPr>
               <a:t>tiêu</a:t>
             </a:r>
             <a:r>
-              <a:rPr lang="en-US" dirty="0" smtClean="0">
+              <a:rPr lang="en-US" dirty="0">
                 <a:latin typeface="Arial" panose="020B0604020202020204" pitchFamily="34" charset="0"/>
                 <a:cs typeface="Arial" panose="020B0604020202020204" pitchFamily="34" charset="0"/>
               </a:rPr>
               <a:t> </a:t>
             </a:r>
             <a:r>
-              <a:rPr lang="en-US" dirty="0" err="1" smtClean="0">
+              <a:rPr lang="en-US" dirty="0" err="1">
                 <a:latin typeface="Arial" panose="020B0604020202020204" pitchFamily="34" charset="0"/>
                 <a:cs typeface="Arial" panose="020B0604020202020204" pitchFamily="34" charset="0"/>
               </a:rPr>
@@ -6445,156 +6543,152 @@
           <a:p>
             <a:pPr algn="ctr"/>
             <a:r>
-              <a:rPr lang="en-US" dirty="0" err="1" smtClean="0">
+              <a:rPr lang="en-US" dirty="0" err="1">
                 <a:latin typeface="Arial" panose="020B0604020202020204" pitchFamily="34" charset="0"/>
                 <a:cs typeface="Arial" panose="020B0604020202020204" pitchFamily="34" charset="0"/>
               </a:rPr>
               <a:t>Kiểm</a:t>
             </a:r>
             <a:r>
-              <a:rPr lang="en-US" dirty="0" smtClean="0">
+              <a:rPr lang="en-US" dirty="0">
                 <a:latin typeface="Arial" panose="020B0604020202020204" pitchFamily="34" charset="0"/>
                 <a:cs typeface="Arial" panose="020B0604020202020204" pitchFamily="34" charset="0"/>
               </a:rPr>
               <a:t> </a:t>
             </a:r>
             <a:r>
-              <a:rPr lang="en-US" dirty="0" err="1" smtClean="0">
+              <a:rPr lang="en-US" dirty="0" err="1">
                 <a:latin typeface="Arial" panose="020B0604020202020204" pitchFamily="34" charset="0"/>
                 <a:cs typeface="Arial" panose="020B0604020202020204" pitchFamily="34" charset="0"/>
               </a:rPr>
               <a:t>soát</a:t>
             </a:r>
             <a:r>
-              <a:rPr lang="en-US" dirty="0" smtClean="0">
+              <a:rPr lang="en-US" dirty="0">
                 <a:latin typeface="Arial" panose="020B0604020202020204" pitchFamily="34" charset="0"/>
                 <a:cs typeface="Arial" panose="020B0604020202020204" pitchFamily="34" charset="0"/>
               </a:rPr>
               <a:t> chi </a:t>
             </a:r>
             <a:r>
-              <a:rPr lang="en-US" dirty="0" err="1" smtClean="0">
+              <a:rPr lang="en-US" dirty="0" err="1">
                 <a:latin typeface="Arial" panose="020B0604020202020204" pitchFamily="34" charset="0"/>
                 <a:cs typeface="Arial" panose="020B0604020202020204" pitchFamily="34" charset="0"/>
               </a:rPr>
               <a:t>tiêu</a:t>
-            </a:r>
-            <a:endParaRPr lang="en-US" dirty="0" smtClean="0">
-              <a:latin typeface="Arial" panose="020B0604020202020204" pitchFamily="34" charset="0"/>
-              <a:cs typeface="Arial" panose="020B0604020202020204" pitchFamily="34" charset="0"/>
-            </a:endParaRPr>
-          </a:p>
-          <a:p>
-            <a:pPr algn="ctr"/>
-            <a:r>
-              <a:rPr lang="en-US" dirty="0" smtClean="0">
-                <a:latin typeface="Arial" panose="020B0604020202020204" pitchFamily="34" charset="0"/>
-                <a:cs typeface="Arial" panose="020B0604020202020204" pitchFamily="34" charset="0"/>
-              </a:rPr>
-              <a:t>(</a:t>
-            </a:r>
-            <a:r>
-              <a:rPr lang="en-US" dirty="0" err="1" smtClean="0">
-                <a:latin typeface="Arial" panose="020B0604020202020204" pitchFamily="34" charset="0"/>
-                <a:cs typeface="Arial" panose="020B0604020202020204" pitchFamily="34" charset="0"/>
-              </a:rPr>
-              <a:t>mua</a:t>
-            </a:r>
-            <a:r>
-              <a:rPr lang="en-US" dirty="0" smtClean="0">
-                <a:latin typeface="Arial" panose="020B0604020202020204" pitchFamily="34" charset="0"/>
-                <a:cs typeface="Arial" panose="020B0604020202020204" pitchFamily="34" charset="0"/>
-              </a:rPr>
-              <a:t> </a:t>
-            </a:r>
-            <a:r>
-              <a:rPr lang="en-US" dirty="0" err="1" smtClean="0">
-                <a:latin typeface="Arial" panose="020B0604020202020204" pitchFamily="34" charset="0"/>
-                <a:cs typeface="Arial" panose="020B0604020202020204" pitchFamily="34" charset="0"/>
-              </a:rPr>
-              <a:t>cái</a:t>
-            </a:r>
-            <a:r>
-              <a:rPr lang="en-US" dirty="0" smtClean="0">
-                <a:latin typeface="Arial" panose="020B0604020202020204" pitchFamily="34" charset="0"/>
-                <a:cs typeface="Arial" panose="020B0604020202020204" pitchFamily="34" charset="0"/>
-              </a:rPr>
-              <a:t> </a:t>
-            </a:r>
-            <a:r>
-              <a:rPr lang="en-US" dirty="0" err="1" smtClean="0">
-                <a:latin typeface="Arial" panose="020B0604020202020204" pitchFamily="34" charset="0"/>
-                <a:cs typeface="Arial" panose="020B0604020202020204" pitchFamily="34" charset="0"/>
-              </a:rPr>
-              <a:t>cần</a:t>
-            </a:r>
-            <a:r>
-              <a:rPr lang="en-US" dirty="0" smtClean="0">
-                <a:latin typeface="Arial" panose="020B0604020202020204" pitchFamily="34" charset="0"/>
-                <a:cs typeface="Arial" panose="020B0604020202020204" pitchFamily="34" charset="0"/>
-              </a:rPr>
-              <a:t> , </a:t>
-            </a:r>
-            <a:r>
-              <a:rPr lang="en-US" dirty="0" err="1" smtClean="0">
-                <a:latin typeface="Arial" panose="020B0604020202020204" pitchFamily="34" charset="0"/>
-                <a:cs typeface="Arial" panose="020B0604020202020204" pitchFamily="34" charset="0"/>
-              </a:rPr>
-              <a:t>ko</a:t>
-            </a:r>
-            <a:r>
-              <a:rPr lang="en-US" dirty="0" smtClean="0">
-                <a:latin typeface="Arial" panose="020B0604020202020204" pitchFamily="34" charset="0"/>
-                <a:cs typeface="Arial" panose="020B0604020202020204" pitchFamily="34" charset="0"/>
-              </a:rPr>
-              <a:t> </a:t>
-            </a:r>
-            <a:r>
-              <a:rPr lang="en-US" dirty="0" err="1" smtClean="0">
-                <a:latin typeface="Arial" panose="020B0604020202020204" pitchFamily="34" charset="0"/>
-                <a:cs typeface="Arial" panose="020B0604020202020204" pitchFamily="34" charset="0"/>
-              </a:rPr>
-              <a:t>phải</a:t>
-            </a:r>
-            <a:r>
-              <a:rPr lang="en-US" dirty="0" smtClean="0">
-                <a:latin typeface="Arial" panose="020B0604020202020204" pitchFamily="34" charset="0"/>
-                <a:cs typeface="Arial" panose="020B0604020202020204" pitchFamily="34" charset="0"/>
-              </a:rPr>
-              <a:t> </a:t>
-            </a:r>
-            <a:r>
-              <a:rPr lang="en-US" dirty="0" err="1" smtClean="0">
-                <a:latin typeface="Arial" panose="020B0604020202020204" pitchFamily="34" charset="0"/>
-                <a:cs typeface="Arial" panose="020B0604020202020204" pitchFamily="34" charset="0"/>
-              </a:rPr>
-              <a:t>cái</a:t>
-            </a:r>
-            <a:r>
-              <a:rPr lang="en-US" dirty="0" smtClean="0">
-                <a:latin typeface="Arial" panose="020B0604020202020204" pitchFamily="34" charset="0"/>
-                <a:cs typeface="Arial" panose="020B0604020202020204" pitchFamily="34" charset="0"/>
-              </a:rPr>
-              <a:t> </a:t>
-            </a:r>
-            <a:r>
-              <a:rPr lang="en-US" dirty="0" err="1" smtClean="0">
-                <a:latin typeface="Arial" panose="020B0604020202020204" pitchFamily="34" charset="0"/>
-                <a:cs typeface="Arial" panose="020B0604020202020204" pitchFamily="34" charset="0"/>
-              </a:rPr>
-              <a:t>muốn</a:t>
-            </a:r>
-            <a:r>
-              <a:rPr lang="en-US" dirty="0" smtClean="0">
-                <a:latin typeface="Arial" panose="020B0604020202020204" pitchFamily="34" charset="0"/>
-                <a:cs typeface="Arial" panose="020B0604020202020204" pitchFamily="34" charset="0"/>
-              </a:rPr>
-              <a:t>)</a:t>
             </a:r>
             <a:endParaRPr lang="en-US" dirty="0">
               <a:latin typeface="Arial" panose="020B0604020202020204" pitchFamily="34" charset="0"/>
               <a:cs typeface="Arial" panose="020B0604020202020204" pitchFamily="34" charset="0"/>
             </a:endParaRPr>
+          </a:p>
+          <a:p>
+            <a:pPr algn="ctr"/>
+            <a:r>
+              <a:rPr lang="en-US" dirty="0">
+                <a:latin typeface="Arial" panose="020B0604020202020204" pitchFamily="34" charset="0"/>
+                <a:cs typeface="Arial" panose="020B0604020202020204" pitchFamily="34" charset="0"/>
+              </a:rPr>
+              <a:t>(</a:t>
+            </a:r>
+            <a:r>
+              <a:rPr lang="en-US" dirty="0" err="1">
+                <a:latin typeface="Arial" panose="020B0604020202020204" pitchFamily="34" charset="0"/>
+                <a:cs typeface="Arial" panose="020B0604020202020204" pitchFamily="34" charset="0"/>
+              </a:rPr>
+              <a:t>mua</a:t>
+            </a:r>
+            <a:r>
+              <a:rPr lang="en-US" dirty="0">
+                <a:latin typeface="Arial" panose="020B0604020202020204" pitchFamily="34" charset="0"/>
+                <a:cs typeface="Arial" panose="020B0604020202020204" pitchFamily="34" charset="0"/>
+              </a:rPr>
+              <a:t> </a:t>
+            </a:r>
+            <a:r>
+              <a:rPr lang="en-US" dirty="0" err="1">
+                <a:latin typeface="Arial" panose="020B0604020202020204" pitchFamily="34" charset="0"/>
+                <a:cs typeface="Arial" panose="020B0604020202020204" pitchFamily="34" charset="0"/>
+              </a:rPr>
+              <a:t>cái</a:t>
+            </a:r>
+            <a:r>
+              <a:rPr lang="en-US" dirty="0">
+                <a:latin typeface="Arial" panose="020B0604020202020204" pitchFamily="34" charset="0"/>
+                <a:cs typeface="Arial" panose="020B0604020202020204" pitchFamily="34" charset="0"/>
+              </a:rPr>
+              <a:t> </a:t>
+            </a:r>
+            <a:r>
+              <a:rPr lang="en-US" dirty="0" err="1">
+                <a:latin typeface="Arial" panose="020B0604020202020204" pitchFamily="34" charset="0"/>
+                <a:cs typeface="Arial" panose="020B0604020202020204" pitchFamily="34" charset="0"/>
+              </a:rPr>
+              <a:t>cần</a:t>
+            </a:r>
+            <a:r>
+              <a:rPr lang="en-US" dirty="0">
+                <a:latin typeface="Arial" panose="020B0604020202020204" pitchFamily="34" charset="0"/>
+                <a:cs typeface="Arial" panose="020B0604020202020204" pitchFamily="34" charset="0"/>
+              </a:rPr>
+              <a:t> , </a:t>
+            </a:r>
+            <a:r>
+              <a:rPr lang="en-US" dirty="0" err="1">
+                <a:latin typeface="Arial" panose="020B0604020202020204" pitchFamily="34" charset="0"/>
+                <a:cs typeface="Arial" panose="020B0604020202020204" pitchFamily="34" charset="0"/>
+              </a:rPr>
+              <a:t>ko</a:t>
+            </a:r>
+            <a:r>
+              <a:rPr lang="en-US" dirty="0">
+                <a:latin typeface="Arial" panose="020B0604020202020204" pitchFamily="34" charset="0"/>
+                <a:cs typeface="Arial" panose="020B0604020202020204" pitchFamily="34" charset="0"/>
+              </a:rPr>
+              <a:t> </a:t>
+            </a:r>
+            <a:r>
+              <a:rPr lang="en-US" dirty="0" err="1">
+                <a:latin typeface="Arial" panose="020B0604020202020204" pitchFamily="34" charset="0"/>
+                <a:cs typeface="Arial" panose="020B0604020202020204" pitchFamily="34" charset="0"/>
+              </a:rPr>
+              <a:t>phải</a:t>
+            </a:r>
+            <a:r>
+              <a:rPr lang="en-US" dirty="0">
+                <a:latin typeface="Arial" panose="020B0604020202020204" pitchFamily="34" charset="0"/>
+                <a:cs typeface="Arial" panose="020B0604020202020204" pitchFamily="34" charset="0"/>
+              </a:rPr>
+              <a:t> </a:t>
+            </a:r>
+            <a:r>
+              <a:rPr lang="en-US" dirty="0" err="1">
+                <a:latin typeface="Arial" panose="020B0604020202020204" pitchFamily="34" charset="0"/>
+                <a:cs typeface="Arial" panose="020B0604020202020204" pitchFamily="34" charset="0"/>
+              </a:rPr>
+              <a:t>cái</a:t>
+            </a:r>
+            <a:r>
+              <a:rPr lang="en-US" dirty="0">
+                <a:latin typeface="Arial" panose="020B0604020202020204" pitchFamily="34" charset="0"/>
+                <a:cs typeface="Arial" panose="020B0604020202020204" pitchFamily="34" charset="0"/>
+              </a:rPr>
+              <a:t> </a:t>
+            </a:r>
+            <a:r>
+              <a:rPr lang="en-US" dirty="0" err="1">
+                <a:latin typeface="Arial" panose="020B0604020202020204" pitchFamily="34" charset="0"/>
+                <a:cs typeface="Arial" panose="020B0604020202020204" pitchFamily="34" charset="0"/>
+              </a:rPr>
+              <a:t>muốn</a:t>
+            </a:r>
+            <a:r>
+              <a:rPr lang="en-US" dirty="0">
+                <a:latin typeface="Arial" panose="020B0604020202020204" pitchFamily="34" charset="0"/>
+                <a:cs typeface="Arial" panose="020B0604020202020204" pitchFamily="34" charset="0"/>
+              </a:rPr>
+              <a:t>)</a:t>
+            </a:r>
           </a:p>
         </p:txBody>
       </p:sp>
@@ -6635,49 +6729,49 @@
           <a:p>
             <a:pPr algn="ctr"/>
             <a:r>
-              <a:rPr lang="en-US" dirty="0" err="1" smtClean="0">
+              <a:rPr lang="en-US" dirty="0" err="1">
                 <a:latin typeface="Arial" panose="020B0604020202020204" pitchFamily="34" charset="0"/>
                 <a:cs typeface="Arial" panose="020B0604020202020204" pitchFamily="34" charset="0"/>
               </a:rPr>
               <a:t>Tách</a:t>
             </a:r>
             <a:r>
-              <a:rPr lang="en-US" dirty="0" smtClean="0">
+              <a:rPr lang="en-US" dirty="0">
                 <a:latin typeface="Arial" panose="020B0604020202020204" pitchFamily="34" charset="0"/>
                 <a:cs typeface="Arial" panose="020B0604020202020204" pitchFamily="34" charset="0"/>
               </a:rPr>
               <a:t> </a:t>
             </a:r>
             <a:r>
-              <a:rPr lang="en-US" dirty="0" err="1" smtClean="0">
+              <a:rPr lang="en-US" dirty="0" err="1">
                 <a:latin typeface="Arial" panose="020B0604020202020204" pitchFamily="34" charset="0"/>
                 <a:cs typeface="Arial" panose="020B0604020202020204" pitchFamily="34" charset="0"/>
               </a:rPr>
               <a:t>biệt</a:t>
             </a:r>
             <a:r>
-              <a:rPr lang="en-US" dirty="0" smtClean="0">
+              <a:rPr lang="en-US" dirty="0">
                 <a:latin typeface="Arial" panose="020B0604020202020204" pitchFamily="34" charset="0"/>
                 <a:cs typeface="Arial" panose="020B0604020202020204" pitchFamily="34" charset="0"/>
               </a:rPr>
               <a:t> </a:t>
             </a:r>
             <a:r>
-              <a:rPr lang="en-US" dirty="0" err="1" smtClean="0">
+              <a:rPr lang="en-US" dirty="0" err="1">
                 <a:latin typeface="Arial" panose="020B0604020202020204" pitchFamily="34" charset="0"/>
                 <a:cs typeface="Arial" panose="020B0604020202020204" pitchFamily="34" charset="0"/>
               </a:rPr>
               <a:t>cảm</a:t>
             </a:r>
             <a:r>
-              <a:rPr lang="en-US" dirty="0" smtClean="0">
+              <a:rPr lang="en-US" dirty="0">
                 <a:latin typeface="Arial" panose="020B0604020202020204" pitchFamily="34" charset="0"/>
                 <a:cs typeface="Arial" panose="020B0604020202020204" pitchFamily="34" charset="0"/>
               </a:rPr>
               <a:t> </a:t>
             </a:r>
             <a:r>
-              <a:rPr lang="en-US" dirty="0" err="1" smtClean="0">
+              <a:rPr lang="en-US" dirty="0" err="1">
                 <a:latin typeface="Arial" panose="020B0604020202020204" pitchFamily="34" charset="0"/>
                 <a:cs typeface="Arial" panose="020B0604020202020204" pitchFamily="34" charset="0"/>
               </a:rPr>
@@ -6700,13 +6794,6 @@
   <p:clrMapOvr>
     <a:masterClrMapping/>
   </p:clrMapOvr>
-  <p:timing>
-    <p:tnLst>
-      <p:par>
-        <p:cTn id="1" dur="indefinite" restart="never" nodeType="tmRoot"/>
-      </p:par>
-    </p:tnLst>
-  </p:timing>
 </p:sld>
 </file>
 
@@ -6750,63 +6837,63 @@
           <a:lstStyle/>
           <a:p>
             <a:r>
-              <a:rPr lang="en-US" sz="3200" dirty="0" err="1" smtClean="0">
+              <a:rPr lang="en-US" sz="3200" dirty="0" err="1">
                 <a:latin typeface="Arial" panose="020B0604020202020204" pitchFamily="34" charset="0"/>
                 <a:cs typeface="Arial" panose="020B0604020202020204" pitchFamily="34" charset="0"/>
               </a:rPr>
               <a:t>Phân</a:t>
             </a:r>
             <a:r>
-              <a:rPr lang="en-US" sz="3200" dirty="0" smtClean="0">
+              <a:rPr lang="en-US" sz="3200" dirty="0">
                 <a:latin typeface="Arial" panose="020B0604020202020204" pitchFamily="34" charset="0"/>
                 <a:cs typeface="Arial" panose="020B0604020202020204" pitchFamily="34" charset="0"/>
               </a:rPr>
               <a:t> </a:t>
             </a:r>
             <a:r>
-              <a:rPr lang="en-US" sz="3200" dirty="0" err="1" smtClean="0">
+              <a:rPr lang="en-US" sz="3200" dirty="0" err="1">
                 <a:latin typeface="Arial" panose="020B0604020202020204" pitchFamily="34" charset="0"/>
                 <a:cs typeface="Arial" panose="020B0604020202020204" pitchFamily="34" charset="0"/>
               </a:rPr>
               <a:t>Bổ</a:t>
             </a:r>
             <a:r>
-              <a:rPr lang="en-US" sz="3200" dirty="0" smtClean="0">
+              <a:rPr lang="en-US" sz="3200" dirty="0">
                 <a:latin typeface="Arial" panose="020B0604020202020204" pitchFamily="34" charset="0"/>
                 <a:cs typeface="Arial" panose="020B0604020202020204" pitchFamily="34" charset="0"/>
               </a:rPr>
               <a:t> </a:t>
             </a:r>
             <a:r>
-              <a:rPr lang="en-US" sz="3200" dirty="0" err="1" smtClean="0">
+              <a:rPr lang="en-US" sz="3200" dirty="0" err="1">
                 <a:latin typeface="Arial" panose="020B0604020202020204" pitchFamily="34" charset="0"/>
                 <a:cs typeface="Arial" panose="020B0604020202020204" pitchFamily="34" charset="0"/>
               </a:rPr>
               <a:t>Khi</a:t>
             </a:r>
             <a:r>
-              <a:rPr lang="en-US" sz="3200" dirty="0" smtClean="0">
+              <a:rPr lang="en-US" sz="3200" dirty="0">
                 <a:latin typeface="Arial" panose="020B0604020202020204" pitchFamily="34" charset="0"/>
                 <a:cs typeface="Arial" panose="020B0604020202020204" pitchFamily="34" charset="0"/>
               </a:rPr>
               <a:t> </a:t>
             </a:r>
             <a:r>
-              <a:rPr lang="en-US" sz="3200" dirty="0" err="1" smtClean="0">
+              <a:rPr lang="en-US" sz="3200" dirty="0" err="1">
                 <a:latin typeface="Arial" panose="020B0604020202020204" pitchFamily="34" charset="0"/>
                 <a:cs typeface="Arial" panose="020B0604020202020204" pitchFamily="34" charset="0"/>
               </a:rPr>
               <a:t>Giữ</a:t>
             </a:r>
             <a:r>
-              <a:rPr lang="en-US" sz="3200" dirty="0" smtClean="0">
+              <a:rPr lang="en-US" sz="3200" dirty="0">
                 <a:latin typeface="Arial" panose="020B0604020202020204" pitchFamily="34" charset="0"/>
                 <a:cs typeface="Arial" panose="020B0604020202020204" pitchFamily="34" charset="0"/>
               </a:rPr>
               <a:t> </a:t>
             </a:r>
             <a:r>
-              <a:rPr lang="en-US" sz="3200" dirty="0" err="1" smtClean="0">
+              <a:rPr lang="en-US" sz="3200" dirty="0" err="1">
                 <a:latin typeface="Arial" panose="020B0604020202020204" pitchFamily="34" charset="0"/>
                 <a:cs typeface="Arial" panose="020B0604020202020204" pitchFamily="34" charset="0"/>
               </a:rPr>
@@ -6856,35 +6943,35 @@
           <a:p>
             <a:pPr algn="ctr"/>
             <a:r>
-              <a:rPr lang="en-US" dirty="0" smtClean="0">
+              <a:rPr lang="en-US" dirty="0">
                 <a:latin typeface="Arial" panose="020B0604020202020204" pitchFamily="34" charset="0"/>
                 <a:cs typeface="Arial" panose="020B0604020202020204" pitchFamily="34" charset="0"/>
               </a:rPr>
               <a:t>Chi </a:t>
             </a:r>
             <a:r>
-              <a:rPr lang="en-US" dirty="0" err="1" smtClean="0">
+              <a:rPr lang="en-US" dirty="0" err="1">
                 <a:latin typeface="Arial" panose="020B0604020202020204" pitchFamily="34" charset="0"/>
                 <a:cs typeface="Arial" panose="020B0604020202020204" pitchFamily="34" charset="0"/>
               </a:rPr>
               <a:t>tiêu</a:t>
             </a:r>
             <a:r>
-              <a:rPr lang="en-US" dirty="0" smtClean="0">
+              <a:rPr lang="en-US" dirty="0">
                 <a:latin typeface="Arial" panose="020B0604020202020204" pitchFamily="34" charset="0"/>
                 <a:cs typeface="Arial" panose="020B0604020202020204" pitchFamily="34" charset="0"/>
               </a:rPr>
               <a:t> (</a:t>
             </a:r>
             <a:r>
-              <a:rPr lang="en-US" dirty="0" err="1" smtClean="0">
-                <a:latin typeface="Arial" panose="020B0604020202020204" pitchFamily="34" charset="0"/>
-                <a:cs typeface="Arial" panose="020B0604020202020204" pitchFamily="34" charset="0"/>
-              </a:rPr>
-              <a:t>Vp</a:t>
-            </a:r>
-            <a:r>
-              <a:rPr lang="en-US" dirty="0" smtClean="0">
+              <a:rPr lang="en-US" dirty="0" err="1">
+                <a:latin typeface="Arial" panose="020B0604020202020204" pitchFamily="34" charset="0"/>
+                <a:cs typeface="Arial" panose="020B0604020202020204" pitchFamily="34" charset="0"/>
+              </a:rPr>
+              <a:t>Tp</a:t>
+            </a:r>
+            <a:r>
+              <a:rPr lang="en-US" dirty="0">
                 <a:latin typeface="Arial" panose="020B0604020202020204" pitchFamily="34" charset="0"/>
                 <a:cs typeface="Arial" panose="020B0604020202020204" pitchFamily="34" charset="0"/>
               </a:rPr>
@@ -6894,16 +6981,12 @@
           <a:p>
             <a:pPr algn="ctr"/>
             <a:r>
-              <a:rPr lang="en-US" dirty="0" smtClean="0">
+              <a:rPr lang="en-US" dirty="0">
                 <a:latin typeface="Arial" panose="020B0604020202020204" pitchFamily="34" charset="0"/>
                 <a:cs typeface="Arial" panose="020B0604020202020204" pitchFamily="34" charset="0"/>
               </a:rPr>
               <a:t>15-50%</a:t>
             </a:r>
-            <a:endParaRPr lang="en-US" dirty="0">
-              <a:latin typeface="Arial" panose="020B0604020202020204" pitchFamily="34" charset="0"/>
-              <a:cs typeface="Arial" panose="020B0604020202020204" pitchFamily="34" charset="0"/>
-            </a:endParaRPr>
           </a:p>
         </p:txBody>
       </p:sp>
@@ -6944,42 +7027,42 @@
           <a:p>
             <a:pPr algn="ctr"/>
             <a:r>
-              <a:rPr lang="en-US" dirty="0" err="1" smtClean="0">
+              <a:rPr lang="en-US" dirty="0" err="1">
                 <a:latin typeface="Arial" panose="020B0604020202020204" pitchFamily="34" charset="0"/>
                 <a:cs typeface="Arial" panose="020B0604020202020204" pitchFamily="34" charset="0"/>
               </a:rPr>
               <a:t>Đầu</a:t>
             </a:r>
             <a:r>
-              <a:rPr lang="en-US" dirty="0" smtClean="0">
+              <a:rPr lang="en-US" dirty="0">
                 <a:latin typeface="Arial" panose="020B0604020202020204" pitchFamily="34" charset="0"/>
                 <a:cs typeface="Arial" panose="020B0604020202020204" pitchFamily="34" charset="0"/>
               </a:rPr>
               <a:t> </a:t>
             </a:r>
             <a:r>
-              <a:rPr lang="en-US" dirty="0" err="1" smtClean="0">
+              <a:rPr lang="en-US" dirty="0" err="1">
                 <a:latin typeface="Arial" panose="020B0604020202020204" pitchFamily="34" charset="0"/>
                 <a:cs typeface="Arial" panose="020B0604020202020204" pitchFamily="34" charset="0"/>
               </a:rPr>
               <a:t>tư</a:t>
             </a:r>
             <a:r>
-              <a:rPr lang="en-US" dirty="0" smtClean="0">
+              <a:rPr lang="en-US" dirty="0">
                 <a:latin typeface="Arial" panose="020B0604020202020204" pitchFamily="34" charset="0"/>
                 <a:cs typeface="Arial" panose="020B0604020202020204" pitchFamily="34" charset="0"/>
               </a:rPr>
               <a:t> ( </a:t>
             </a:r>
             <a:r>
-              <a:rPr lang="en-US" dirty="0" err="1" smtClean="0">
+              <a:rPr lang="en-US" dirty="0" err="1">
                 <a:latin typeface="Arial" panose="020B0604020202020204" pitchFamily="34" charset="0"/>
                 <a:cs typeface="Arial" panose="020B0604020202020204" pitchFamily="34" charset="0"/>
               </a:rPr>
               <a:t>techcombank</a:t>
             </a:r>
             <a:r>
-              <a:rPr lang="en-US" dirty="0" smtClean="0">
+              <a:rPr lang="en-US" dirty="0">
                 <a:latin typeface="Arial" panose="020B0604020202020204" pitchFamily="34" charset="0"/>
                 <a:cs typeface="Arial" panose="020B0604020202020204" pitchFamily="34" charset="0"/>
               </a:rPr>
@@ -6989,16 +7072,12 @@
           <a:p>
             <a:pPr algn="ctr"/>
             <a:r>
-              <a:rPr lang="en-US" dirty="0" smtClean="0">
+              <a:rPr lang="en-US" dirty="0">
                 <a:latin typeface="Arial" panose="020B0604020202020204" pitchFamily="34" charset="0"/>
                 <a:cs typeface="Arial" panose="020B0604020202020204" pitchFamily="34" charset="0"/>
               </a:rPr>
               <a:t>remain</a:t>
             </a:r>
-            <a:endParaRPr lang="en-US" dirty="0">
-              <a:latin typeface="Arial" panose="020B0604020202020204" pitchFamily="34" charset="0"/>
-              <a:cs typeface="Arial" panose="020B0604020202020204" pitchFamily="34" charset="0"/>
-            </a:endParaRPr>
           </a:p>
         </p:txBody>
       </p:sp>
@@ -7039,51 +7118,47 @@
           <a:p>
             <a:pPr algn="ctr"/>
             <a:r>
-              <a:rPr lang="en-US" dirty="0" err="1" smtClean="0">
+              <a:rPr lang="en-US" dirty="0" err="1">
                 <a:latin typeface="Arial" panose="020B0604020202020204" pitchFamily="34" charset="0"/>
                 <a:cs typeface="Arial" panose="020B0604020202020204" pitchFamily="34" charset="0"/>
               </a:rPr>
               <a:t>Giáo</a:t>
             </a:r>
             <a:r>
-              <a:rPr lang="en-US" dirty="0" smtClean="0">
+              <a:rPr lang="en-US" dirty="0">
                 <a:latin typeface="Arial" panose="020B0604020202020204" pitchFamily="34" charset="0"/>
                 <a:cs typeface="Arial" panose="020B0604020202020204" pitchFamily="34" charset="0"/>
               </a:rPr>
               <a:t> </a:t>
             </a:r>
             <a:r>
-              <a:rPr lang="en-US" dirty="0" err="1" smtClean="0">
+              <a:rPr lang="en-US" dirty="0" err="1">
                 <a:latin typeface="Arial" panose="020B0604020202020204" pitchFamily="34" charset="0"/>
                 <a:cs typeface="Arial" panose="020B0604020202020204" pitchFamily="34" charset="0"/>
               </a:rPr>
               <a:t>dục</a:t>
             </a:r>
             <a:r>
-              <a:rPr lang="en-US" dirty="0" smtClean="0">
+              <a:rPr lang="en-US" dirty="0">
                 <a:latin typeface="Arial" panose="020B0604020202020204" pitchFamily="34" charset="0"/>
                 <a:cs typeface="Arial" panose="020B0604020202020204" pitchFamily="34" charset="0"/>
               </a:rPr>
               <a:t> (</a:t>
             </a:r>
             <a:r>
-              <a:rPr lang="en-US" dirty="0" err="1" smtClean="0">
+              <a:rPr lang="en-US" dirty="0" err="1">
                 <a:latin typeface="Arial" panose="020B0604020202020204" pitchFamily="34" charset="0"/>
                 <a:cs typeface="Arial" panose="020B0604020202020204" pitchFamily="34" charset="0"/>
               </a:rPr>
               <a:t>Agri</a:t>
             </a:r>
             <a:r>
-              <a:rPr lang="en-US" dirty="0" smtClean="0">
+              <a:rPr lang="en-US" dirty="0">
                 <a:latin typeface="Arial" panose="020B0604020202020204" pitchFamily="34" charset="0"/>
                 <a:cs typeface="Arial" panose="020B0604020202020204" pitchFamily="34" charset="0"/>
               </a:rPr>
               <a:t>) 2-10%</a:t>
             </a:r>
-            <a:endParaRPr lang="en-US" dirty="0">
-              <a:latin typeface="Arial" panose="020B0604020202020204" pitchFamily="34" charset="0"/>
-              <a:cs typeface="Arial" panose="020B0604020202020204" pitchFamily="34" charset="0"/>
-            </a:endParaRPr>
           </a:p>
         </p:txBody>
       </p:sp>
@@ -7124,28 +7199,28 @@
           <a:p>
             <a:pPr algn="ctr"/>
             <a:r>
-              <a:rPr lang="en-US" dirty="0" err="1" smtClean="0">
+              <a:rPr lang="en-US" dirty="0" err="1">
                 <a:latin typeface="Arial" panose="020B0604020202020204" pitchFamily="34" charset="0"/>
                 <a:cs typeface="Arial" panose="020B0604020202020204" pitchFamily="34" charset="0"/>
               </a:rPr>
               <a:t>Ăn</a:t>
             </a:r>
             <a:r>
-              <a:rPr lang="en-US" dirty="0" smtClean="0">
+              <a:rPr lang="en-US" dirty="0">
                 <a:latin typeface="Arial" panose="020B0604020202020204" pitchFamily="34" charset="0"/>
                 <a:cs typeface="Arial" panose="020B0604020202020204" pitchFamily="34" charset="0"/>
               </a:rPr>
               <a:t> </a:t>
             </a:r>
             <a:r>
-              <a:rPr lang="en-US" dirty="0" err="1" smtClean="0">
+              <a:rPr lang="en-US" dirty="0" err="1">
                 <a:latin typeface="Arial" panose="020B0604020202020204" pitchFamily="34" charset="0"/>
                 <a:cs typeface="Arial" panose="020B0604020202020204" pitchFamily="34" charset="0"/>
               </a:rPr>
               <a:t>chơi</a:t>
             </a:r>
             <a:r>
-              <a:rPr lang="en-US" dirty="0" smtClean="0">
+              <a:rPr lang="en-US" dirty="0">
                 <a:latin typeface="Arial" panose="020B0604020202020204" pitchFamily="34" charset="0"/>
                 <a:cs typeface="Arial" panose="020B0604020202020204" pitchFamily="34" charset="0"/>
               </a:rPr>
@@ -7155,16 +7230,12 @@
           <a:p>
             <a:pPr algn="ctr"/>
             <a:r>
-              <a:rPr lang="en-US" dirty="0" smtClean="0">
+              <a:rPr lang="en-US" dirty="0">
                 <a:latin typeface="Arial" panose="020B0604020202020204" pitchFamily="34" charset="0"/>
                 <a:cs typeface="Arial" panose="020B0604020202020204" pitchFamily="34" charset="0"/>
               </a:rPr>
               <a:t>2-5%</a:t>
             </a:r>
-            <a:endParaRPr lang="en-US" dirty="0">
-              <a:latin typeface="Arial" panose="020B0604020202020204" pitchFamily="34" charset="0"/>
-              <a:cs typeface="Arial" panose="020B0604020202020204" pitchFamily="34" charset="0"/>
-            </a:endParaRPr>
           </a:p>
         </p:txBody>
       </p:sp>
@@ -7205,44 +7276,40 @@
           <a:p>
             <a:pPr algn="ctr"/>
             <a:r>
-              <a:rPr lang="en-US" dirty="0" err="1" smtClean="0">
+              <a:rPr lang="en-US" dirty="0" err="1">
                 <a:latin typeface="Arial" panose="020B0604020202020204" pitchFamily="34" charset="0"/>
                 <a:cs typeface="Arial" panose="020B0604020202020204" pitchFamily="34" charset="0"/>
               </a:rPr>
               <a:t>Quỹ</a:t>
             </a:r>
             <a:r>
-              <a:rPr lang="en-US" dirty="0" smtClean="0">
+              <a:rPr lang="en-US" dirty="0">
                 <a:latin typeface="Arial" panose="020B0604020202020204" pitchFamily="34" charset="0"/>
                 <a:cs typeface="Arial" panose="020B0604020202020204" pitchFamily="34" charset="0"/>
               </a:rPr>
               <a:t> </a:t>
             </a:r>
             <a:r>
-              <a:rPr lang="en-US" dirty="0" err="1" smtClean="0">
+              <a:rPr lang="en-US" dirty="0" err="1">
                 <a:latin typeface="Arial" panose="020B0604020202020204" pitchFamily="34" charset="0"/>
                 <a:cs typeface="Arial" panose="020B0604020202020204" pitchFamily="34" charset="0"/>
               </a:rPr>
               <a:t>Hưu</a:t>
-            </a:r>
-            <a:endParaRPr lang="en-US" dirty="0" smtClean="0">
-              <a:latin typeface="Arial" panose="020B0604020202020204" pitchFamily="34" charset="0"/>
-              <a:cs typeface="Arial" panose="020B0604020202020204" pitchFamily="34" charset="0"/>
-            </a:endParaRPr>
-          </a:p>
-          <a:p>
-            <a:pPr algn="ctr"/>
-            <a:r>
-              <a:rPr lang="en-US" dirty="0" smtClean="0">
-                <a:latin typeface="Arial" panose="020B0604020202020204" pitchFamily="34" charset="0"/>
-                <a:cs typeface="Arial" panose="020B0604020202020204" pitchFamily="34" charset="0"/>
-              </a:rPr>
-              <a:t>5-15%</a:t>
             </a:r>
             <a:endParaRPr lang="en-US" dirty="0">
               <a:latin typeface="Arial" panose="020B0604020202020204" pitchFamily="34" charset="0"/>
               <a:cs typeface="Arial" panose="020B0604020202020204" pitchFamily="34" charset="0"/>
             </a:endParaRPr>
+          </a:p>
+          <a:p>
+            <a:pPr algn="ctr"/>
+            <a:r>
+              <a:rPr lang="en-US" dirty="0">
+                <a:latin typeface="Arial" panose="020B0604020202020204" pitchFamily="34" charset="0"/>
+                <a:cs typeface="Arial" panose="020B0604020202020204" pitchFamily="34" charset="0"/>
+              </a:rPr>
+              <a:t>5-15%</a:t>
+            </a:r>
           </a:p>
         </p:txBody>
       </p:sp>
@@ -7256,13 +7323,6 @@
   <p:clrMapOvr>
     <a:masterClrMapping/>
   </p:clrMapOvr>
-  <p:timing>
-    <p:tnLst>
-      <p:par>
-        <p:cTn id="1" dur="indefinite" restart="never" nodeType="tmRoot"/>
-      </p:par>
-    </p:tnLst>
-  </p:timing>
 </p:sld>
 </file>
 
@@ -7306,119 +7366,119 @@
           <a:lstStyle/>
           <a:p>
             <a:r>
-              <a:rPr lang="en-US" sz="3200" dirty="0" err="1" smtClean="0">
+              <a:rPr lang="en-US" sz="3200" dirty="0" err="1">
                 <a:latin typeface="Arial" panose="020B0604020202020204" pitchFamily="34" charset="0"/>
                 <a:cs typeface="Arial" panose="020B0604020202020204" pitchFamily="34" charset="0"/>
               </a:rPr>
               <a:t>Tại</a:t>
             </a:r>
             <a:r>
-              <a:rPr lang="en-US" sz="3200" dirty="0" smtClean="0">
+              <a:rPr lang="en-US" sz="3200" dirty="0">
                 <a:latin typeface="Arial" panose="020B0604020202020204" pitchFamily="34" charset="0"/>
                 <a:cs typeface="Arial" panose="020B0604020202020204" pitchFamily="34" charset="0"/>
               </a:rPr>
               <a:t> </a:t>
             </a:r>
             <a:r>
-              <a:rPr lang="en-US" sz="3200" dirty="0" err="1" smtClean="0">
+              <a:rPr lang="en-US" sz="3200" dirty="0" err="1">
                 <a:latin typeface="Arial" panose="020B0604020202020204" pitchFamily="34" charset="0"/>
                 <a:cs typeface="Arial" panose="020B0604020202020204" pitchFamily="34" charset="0"/>
               </a:rPr>
               <a:t>sao</a:t>
             </a:r>
             <a:r>
-              <a:rPr lang="en-US" sz="3200" dirty="0" smtClean="0">
+              <a:rPr lang="en-US" sz="3200" dirty="0">
                 <a:latin typeface="Arial" panose="020B0604020202020204" pitchFamily="34" charset="0"/>
                 <a:cs typeface="Arial" panose="020B0604020202020204" pitchFamily="34" charset="0"/>
               </a:rPr>
               <a:t> trade ( </a:t>
             </a:r>
             <a:r>
-              <a:rPr lang="en-US" sz="3200" dirty="0" err="1" smtClean="0">
+              <a:rPr lang="en-US" sz="3200" dirty="0" err="1">
                 <a:latin typeface="Arial" panose="020B0604020202020204" pitchFamily="34" charset="0"/>
                 <a:cs typeface="Arial" panose="020B0604020202020204" pitchFamily="34" charset="0"/>
               </a:rPr>
               <a:t>giao</a:t>
             </a:r>
             <a:r>
-              <a:rPr lang="en-US" sz="3200" dirty="0" smtClean="0">
+              <a:rPr lang="en-US" sz="3200" dirty="0">
                 <a:latin typeface="Arial" panose="020B0604020202020204" pitchFamily="34" charset="0"/>
                 <a:cs typeface="Arial" panose="020B0604020202020204" pitchFamily="34" charset="0"/>
               </a:rPr>
               <a:t> </a:t>
             </a:r>
             <a:r>
-              <a:rPr lang="en-US" sz="3200" dirty="0" err="1" smtClean="0">
+              <a:rPr lang="en-US" sz="3200" dirty="0" err="1">
                 <a:latin typeface="Arial" panose="020B0604020202020204" pitchFamily="34" charset="0"/>
                 <a:cs typeface="Arial" panose="020B0604020202020204" pitchFamily="34" charset="0"/>
               </a:rPr>
               <a:t>dịch</a:t>
             </a:r>
             <a:r>
-              <a:rPr lang="en-US" sz="3200" dirty="0" smtClean="0">
+              <a:rPr lang="en-US" sz="3200" dirty="0">
                 <a:latin typeface="Arial" panose="020B0604020202020204" pitchFamily="34" charset="0"/>
                 <a:cs typeface="Arial" panose="020B0604020202020204" pitchFamily="34" charset="0"/>
               </a:rPr>
               <a:t> ) </a:t>
             </a:r>
             <a:r>
-              <a:rPr lang="en-US" sz="3200" dirty="0" err="1" smtClean="0">
+              <a:rPr lang="en-US" sz="3200" dirty="0" err="1">
                 <a:latin typeface="Arial" panose="020B0604020202020204" pitchFamily="34" charset="0"/>
                 <a:cs typeface="Arial" panose="020B0604020202020204" pitchFamily="34" charset="0"/>
               </a:rPr>
               <a:t>lại</a:t>
             </a:r>
             <a:r>
-              <a:rPr lang="en-US" sz="3200" dirty="0" smtClean="0">
+              <a:rPr lang="en-US" sz="3200" dirty="0">
                 <a:latin typeface="Arial" panose="020B0604020202020204" pitchFamily="34" charset="0"/>
                 <a:cs typeface="Arial" panose="020B0604020202020204" pitchFamily="34" charset="0"/>
               </a:rPr>
               <a:t> </a:t>
             </a:r>
             <a:r>
-              <a:rPr lang="en-US" sz="3200" dirty="0" err="1" smtClean="0">
+              <a:rPr lang="en-US" sz="3200" dirty="0" err="1">
                 <a:latin typeface="Arial" panose="020B0604020202020204" pitchFamily="34" charset="0"/>
                 <a:cs typeface="Arial" panose="020B0604020202020204" pitchFamily="34" charset="0"/>
               </a:rPr>
               <a:t>giúp</a:t>
             </a:r>
             <a:r>
-              <a:rPr lang="en-US" sz="3200" dirty="0" smtClean="0">
+              <a:rPr lang="en-US" sz="3200" dirty="0">
                 <a:latin typeface="Arial" panose="020B0604020202020204" pitchFamily="34" charset="0"/>
                 <a:cs typeface="Arial" panose="020B0604020202020204" pitchFamily="34" charset="0"/>
               </a:rPr>
               <a:t> </a:t>
             </a:r>
             <a:r>
-              <a:rPr lang="en-US" sz="3200" dirty="0" err="1" smtClean="0">
+              <a:rPr lang="en-US" sz="3200" dirty="0" err="1">
                 <a:latin typeface="Arial" panose="020B0604020202020204" pitchFamily="34" charset="0"/>
                 <a:cs typeface="Arial" panose="020B0604020202020204" pitchFamily="34" charset="0"/>
               </a:rPr>
               <a:t>tự</a:t>
             </a:r>
             <a:r>
-              <a:rPr lang="en-US" sz="3200" dirty="0" smtClean="0">
+              <a:rPr lang="en-US" sz="3200" dirty="0">
                 <a:latin typeface="Arial" panose="020B0604020202020204" pitchFamily="34" charset="0"/>
                 <a:cs typeface="Arial" panose="020B0604020202020204" pitchFamily="34" charset="0"/>
               </a:rPr>
               <a:t> do </a:t>
             </a:r>
             <a:r>
-              <a:rPr lang="en-US" sz="3200" dirty="0" err="1" smtClean="0">
+              <a:rPr lang="en-US" sz="3200" dirty="0" err="1">
                 <a:latin typeface="Arial" panose="020B0604020202020204" pitchFamily="34" charset="0"/>
                 <a:cs typeface="Arial" panose="020B0604020202020204" pitchFamily="34" charset="0"/>
               </a:rPr>
               <a:t>tài</a:t>
             </a:r>
             <a:r>
-              <a:rPr lang="en-US" sz="3200" dirty="0" smtClean="0">
+              <a:rPr lang="en-US" sz="3200" dirty="0">
                 <a:latin typeface="Arial" panose="020B0604020202020204" pitchFamily="34" charset="0"/>
                 <a:cs typeface="Arial" panose="020B0604020202020204" pitchFamily="34" charset="0"/>
               </a:rPr>
               <a:t> </a:t>
             </a:r>
             <a:r>
-              <a:rPr lang="en-US" sz="3200" dirty="0" err="1" smtClean="0">
+              <a:rPr lang="en-US" sz="3200" dirty="0" err="1">
                 <a:latin typeface="Arial" panose="020B0604020202020204" pitchFamily="34" charset="0"/>
                 <a:cs typeface="Arial" panose="020B0604020202020204" pitchFamily="34" charset="0"/>
               </a:rPr>
@@ -7468,105 +7528,105 @@
           <a:p>
             <a:pPr algn="ctr"/>
             <a:r>
-              <a:rPr lang="en-US" dirty="0" err="1" smtClean="0">
+              <a:rPr lang="en-US" dirty="0" err="1">
                 <a:latin typeface="Arial" panose="020B0604020202020204" pitchFamily="34" charset="0"/>
                 <a:cs typeface="Arial" panose="020B0604020202020204" pitchFamily="34" charset="0"/>
               </a:rPr>
               <a:t>Ko</a:t>
             </a:r>
             <a:r>
-              <a:rPr lang="en-US" dirty="0" smtClean="0">
+              <a:rPr lang="en-US" dirty="0">
                 <a:latin typeface="Arial" panose="020B0604020202020204" pitchFamily="34" charset="0"/>
                 <a:cs typeface="Arial" panose="020B0604020202020204" pitchFamily="34" charset="0"/>
               </a:rPr>
               <a:t> </a:t>
             </a:r>
             <a:r>
-              <a:rPr lang="en-US" dirty="0" err="1" smtClean="0">
+              <a:rPr lang="en-US" dirty="0" err="1">
                 <a:latin typeface="Arial" panose="020B0604020202020204" pitchFamily="34" charset="0"/>
                 <a:cs typeface="Arial" panose="020B0604020202020204" pitchFamily="34" charset="0"/>
               </a:rPr>
               <a:t>cần</a:t>
             </a:r>
             <a:r>
-              <a:rPr lang="en-US" dirty="0" smtClean="0">
+              <a:rPr lang="en-US" dirty="0">
                 <a:latin typeface="Arial" panose="020B0604020202020204" pitchFamily="34" charset="0"/>
                 <a:cs typeface="Arial" panose="020B0604020202020204" pitchFamily="34" charset="0"/>
               </a:rPr>
               <a:t> </a:t>
             </a:r>
             <a:r>
-              <a:rPr lang="en-US" dirty="0" err="1" smtClean="0">
+              <a:rPr lang="en-US" dirty="0" err="1">
                 <a:latin typeface="Arial" panose="020B0604020202020204" pitchFamily="34" charset="0"/>
                 <a:cs typeface="Arial" panose="020B0604020202020204" pitchFamily="34" charset="0"/>
               </a:rPr>
               <a:t>sản</a:t>
             </a:r>
             <a:r>
-              <a:rPr lang="en-US" dirty="0" smtClean="0">
+              <a:rPr lang="en-US" dirty="0">
                 <a:latin typeface="Arial" panose="020B0604020202020204" pitchFamily="34" charset="0"/>
                 <a:cs typeface="Arial" panose="020B0604020202020204" pitchFamily="34" charset="0"/>
               </a:rPr>
               <a:t> </a:t>
             </a:r>
             <a:r>
-              <a:rPr lang="en-US" dirty="0" err="1" smtClean="0">
+              <a:rPr lang="en-US" dirty="0" err="1">
                 <a:latin typeface="Arial" panose="020B0604020202020204" pitchFamily="34" charset="0"/>
                 <a:cs typeface="Arial" panose="020B0604020202020204" pitchFamily="34" charset="0"/>
               </a:rPr>
               <a:t>xuất</a:t>
             </a:r>
             <a:r>
-              <a:rPr lang="en-US" dirty="0" smtClean="0">
+              <a:rPr lang="en-US" dirty="0">
                 <a:latin typeface="Arial" panose="020B0604020202020204" pitchFamily="34" charset="0"/>
                 <a:cs typeface="Arial" panose="020B0604020202020204" pitchFamily="34" charset="0"/>
               </a:rPr>
               <a:t> hay </a:t>
             </a:r>
             <a:r>
-              <a:rPr lang="en-US" dirty="0" err="1" smtClean="0">
+              <a:rPr lang="en-US" dirty="0" err="1">
                 <a:latin typeface="Arial" panose="020B0604020202020204" pitchFamily="34" charset="0"/>
                 <a:cs typeface="Arial" panose="020B0604020202020204" pitchFamily="34" charset="0"/>
               </a:rPr>
               <a:t>tạo</a:t>
             </a:r>
             <a:r>
-              <a:rPr lang="en-US" dirty="0" smtClean="0">
+              <a:rPr lang="en-US" dirty="0">
                 <a:latin typeface="Arial" panose="020B0604020202020204" pitchFamily="34" charset="0"/>
                 <a:cs typeface="Arial" panose="020B0604020202020204" pitchFamily="34" charset="0"/>
               </a:rPr>
               <a:t> </a:t>
             </a:r>
             <a:r>
-              <a:rPr lang="en-US" dirty="0" err="1" smtClean="0">
+              <a:rPr lang="en-US" dirty="0" err="1">
                 <a:latin typeface="Arial" panose="020B0604020202020204" pitchFamily="34" charset="0"/>
                 <a:cs typeface="Arial" panose="020B0604020202020204" pitchFamily="34" charset="0"/>
               </a:rPr>
               <a:t>ra</a:t>
             </a:r>
             <a:r>
-              <a:rPr lang="en-US" dirty="0" smtClean="0">
+              <a:rPr lang="en-US" dirty="0">
                 <a:latin typeface="Arial" panose="020B0604020202020204" pitchFamily="34" charset="0"/>
                 <a:cs typeface="Arial" panose="020B0604020202020204" pitchFamily="34" charset="0"/>
               </a:rPr>
               <a:t> </a:t>
             </a:r>
             <a:r>
-              <a:rPr lang="en-US" dirty="0" err="1" smtClean="0">
+              <a:rPr lang="en-US" dirty="0" err="1">
                 <a:latin typeface="Arial" panose="020B0604020202020204" pitchFamily="34" charset="0"/>
                 <a:cs typeface="Arial" panose="020B0604020202020204" pitchFamily="34" charset="0"/>
               </a:rPr>
               <a:t>gì</a:t>
             </a:r>
             <a:r>
-              <a:rPr lang="en-US" dirty="0" smtClean="0">
+              <a:rPr lang="en-US" dirty="0">
                 <a:latin typeface="Arial" panose="020B0604020202020204" pitchFamily="34" charset="0"/>
                 <a:cs typeface="Arial" panose="020B0604020202020204" pitchFamily="34" charset="0"/>
               </a:rPr>
               <a:t> </a:t>
             </a:r>
             <a:r>
-              <a:rPr lang="en-US" dirty="0" err="1" smtClean="0">
+              <a:rPr lang="en-US" dirty="0" err="1">
                 <a:latin typeface="Arial" panose="020B0604020202020204" pitchFamily="34" charset="0"/>
                 <a:cs typeface="Arial" panose="020B0604020202020204" pitchFamily="34" charset="0"/>
               </a:rPr>
@@ -7616,91 +7676,91 @@
           <a:p>
             <a:pPr algn="ctr"/>
             <a:r>
-              <a:rPr lang="en-US" dirty="0" err="1" smtClean="0">
+              <a:rPr lang="en-US" dirty="0" err="1">
                 <a:latin typeface="Arial" panose="020B0604020202020204" pitchFamily="34" charset="0"/>
                 <a:cs typeface="Arial" panose="020B0604020202020204" pitchFamily="34" charset="0"/>
               </a:rPr>
               <a:t>Ko</a:t>
             </a:r>
             <a:r>
-              <a:rPr lang="en-US" dirty="0" smtClean="0">
+              <a:rPr lang="en-US" dirty="0">
                 <a:latin typeface="Arial" panose="020B0604020202020204" pitchFamily="34" charset="0"/>
                 <a:cs typeface="Arial" panose="020B0604020202020204" pitchFamily="34" charset="0"/>
               </a:rPr>
               <a:t> </a:t>
             </a:r>
             <a:r>
-              <a:rPr lang="en-US" dirty="0" err="1" smtClean="0">
+              <a:rPr lang="en-US" dirty="0" err="1">
                 <a:latin typeface="Arial" panose="020B0604020202020204" pitchFamily="34" charset="0"/>
                 <a:cs typeface="Arial" panose="020B0604020202020204" pitchFamily="34" charset="0"/>
               </a:rPr>
               <a:t>cố</a:t>
             </a:r>
             <a:r>
-              <a:rPr lang="en-US" dirty="0" smtClean="0">
+              <a:rPr lang="en-US" dirty="0">
                 <a:latin typeface="Arial" panose="020B0604020202020204" pitchFamily="34" charset="0"/>
                 <a:cs typeface="Arial" panose="020B0604020202020204" pitchFamily="34" charset="0"/>
               </a:rPr>
               <a:t> </a:t>
             </a:r>
             <a:r>
-              <a:rPr lang="en-US" dirty="0" err="1" smtClean="0">
+              <a:rPr lang="en-US" dirty="0" err="1">
                 <a:latin typeface="Arial" panose="020B0604020202020204" pitchFamily="34" charset="0"/>
                 <a:cs typeface="Arial" panose="020B0604020202020204" pitchFamily="34" charset="0"/>
               </a:rPr>
               <a:t>định</a:t>
             </a:r>
             <a:r>
-              <a:rPr lang="en-US" dirty="0" smtClean="0">
+              <a:rPr lang="en-US" dirty="0">
                 <a:latin typeface="Arial" panose="020B0604020202020204" pitchFamily="34" charset="0"/>
                 <a:cs typeface="Arial" panose="020B0604020202020204" pitchFamily="34" charset="0"/>
               </a:rPr>
               <a:t> </a:t>
             </a:r>
             <a:r>
-              <a:rPr lang="en-US" dirty="0" err="1" smtClean="0">
+              <a:rPr lang="en-US" dirty="0" err="1">
                 <a:latin typeface="Arial" panose="020B0604020202020204" pitchFamily="34" charset="0"/>
                 <a:cs typeface="Arial" panose="020B0604020202020204" pitchFamily="34" charset="0"/>
               </a:rPr>
               <a:t>thời</a:t>
             </a:r>
             <a:r>
-              <a:rPr lang="en-US" dirty="0" smtClean="0">
+              <a:rPr lang="en-US" dirty="0">
                 <a:latin typeface="Arial" panose="020B0604020202020204" pitchFamily="34" charset="0"/>
                 <a:cs typeface="Arial" panose="020B0604020202020204" pitchFamily="34" charset="0"/>
               </a:rPr>
               <a:t> </a:t>
             </a:r>
             <a:r>
-              <a:rPr lang="en-US" dirty="0" err="1" smtClean="0">
+              <a:rPr lang="en-US" dirty="0" err="1">
                 <a:latin typeface="Arial" panose="020B0604020202020204" pitchFamily="34" charset="0"/>
                 <a:cs typeface="Arial" panose="020B0604020202020204" pitchFamily="34" charset="0"/>
               </a:rPr>
               <a:t>gian</a:t>
             </a:r>
             <a:r>
-              <a:rPr lang="en-US" dirty="0" smtClean="0">
+              <a:rPr lang="en-US" dirty="0">
                 <a:latin typeface="Arial" panose="020B0604020202020204" pitchFamily="34" charset="0"/>
                 <a:cs typeface="Arial" panose="020B0604020202020204" pitchFamily="34" charset="0"/>
               </a:rPr>
               <a:t>, </a:t>
             </a:r>
             <a:r>
-              <a:rPr lang="en-US" dirty="0" err="1" smtClean="0">
+              <a:rPr lang="en-US" dirty="0" err="1">
                 <a:latin typeface="Arial" panose="020B0604020202020204" pitchFamily="34" charset="0"/>
                 <a:cs typeface="Arial" panose="020B0604020202020204" pitchFamily="34" charset="0"/>
               </a:rPr>
               <a:t>địa</a:t>
             </a:r>
             <a:r>
-              <a:rPr lang="en-US" dirty="0" smtClean="0">
+              <a:rPr lang="en-US" dirty="0">
                 <a:latin typeface="Arial" panose="020B0604020202020204" pitchFamily="34" charset="0"/>
                 <a:cs typeface="Arial" panose="020B0604020202020204" pitchFamily="34" charset="0"/>
               </a:rPr>
               <a:t> </a:t>
             </a:r>
             <a:r>
-              <a:rPr lang="en-US" dirty="0" err="1" smtClean="0">
+              <a:rPr lang="en-US" dirty="0" err="1">
                 <a:latin typeface="Arial" panose="020B0604020202020204" pitchFamily="34" charset="0"/>
                 <a:cs typeface="Arial" panose="020B0604020202020204" pitchFamily="34" charset="0"/>
               </a:rPr>
@@ -7750,63 +7810,63 @@
           <a:p>
             <a:pPr algn="ctr"/>
             <a:r>
-              <a:rPr lang="en-US" dirty="0" err="1" smtClean="0">
+              <a:rPr lang="en-US" dirty="0" err="1">
                 <a:latin typeface="Arial" panose="020B0604020202020204" pitchFamily="34" charset="0"/>
                 <a:cs typeface="Arial" panose="020B0604020202020204" pitchFamily="34" charset="0"/>
               </a:rPr>
               <a:t>Đòn</a:t>
             </a:r>
             <a:r>
-              <a:rPr lang="en-US" dirty="0" smtClean="0">
+              <a:rPr lang="en-US" dirty="0">
                 <a:latin typeface="Arial" panose="020B0604020202020204" pitchFamily="34" charset="0"/>
                 <a:cs typeface="Arial" panose="020B0604020202020204" pitchFamily="34" charset="0"/>
               </a:rPr>
               <a:t> </a:t>
             </a:r>
             <a:r>
-              <a:rPr lang="en-US" dirty="0" err="1" smtClean="0">
+              <a:rPr lang="en-US" dirty="0" err="1">
                 <a:latin typeface="Arial" panose="020B0604020202020204" pitchFamily="34" charset="0"/>
                 <a:cs typeface="Arial" panose="020B0604020202020204" pitchFamily="34" charset="0"/>
               </a:rPr>
               <a:t>bẩy</a:t>
             </a:r>
             <a:r>
-              <a:rPr lang="en-US" dirty="0" smtClean="0">
+              <a:rPr lang="en-US" dirty="0">
                 <a:latin typeface="Arial" panose="020B0604020202020204" pitchFamily="34" charset="0"/>
                 <a:cs typeface="Arial" panose="020B0604020202020204" pitchFamily="34" charset="0"/>
               </a:rPr>
               <a:t> </a:t>
             </a:r>
             <a:r>
-              <a:rPr lang="en-US" dirty="0" err="1" smtClean="0">
+              <a:rPr lang="en-US" dirty="0" err="1">
                 <a:latin typeface="Arial" panose="020B0604020202020204" pitchFamily="34" charset="0"/>
                 <a:cs typeface="Arial" panose="020B0604020202020204" pitchFamily="34" charset="0"/>
               </a:rPr>
               <a:t>được</a:t>
             </a:r>
             <a:r>
-              <a:rPr lang="en-US" dirty="0" smtClean="0">
+              <a:rPr lang="en-US" dirty="0">
                 <a:latin typeface="Arial" panose="020B0604020202020204" pitchFamily="34" charset="0"/>
                 <a:cs typeface="Arial" panose="020B0604020202020204" pitchFamily="34" charset="0"/>
               </a:rPr>
               <a:t> </a:t>
             </a:r>
             <a:r>
-              <a:rPr lang="en-US" dirty="0" err="1" smtClean="0">
+              <a:rPr lang="en-US" dirty="0" err="1">
                 <a:latin typeface="Arial" panose="020B0604020202020204" pitchFamily="34" charset="0"/>
                 <a:cs typeface="Arial" panose="020B0604020202020204" pitchFamily="34" charset="0"/>
               </a:rPr>
               <a:t>lãi</a:t>
             </a:r>
             <a:r>
-              <a:rPr lang="en-US" dirty="0" smtClean="0">
+              <a:rPr lang="en-US" dirty="0">
                 <a:latin typeface="Arial" panose="020B0604020202020204" pitchFamily="34" charset="0"/>
                 <a:cs typeface="Arial" panose="020B0604020202020204" pitchFamily="34" charset="0"/>
               </a:rPr>
               <a:t> </a:t>
             </a:r>
             <a:r>
-              <a:rPr lang="en-US" dirty="0" err="1" smtClean="0">
+              <a:rPr lang="en-US" dirty="0" err="1">
                 <a:latin typeface="Arial" panose="020B0604020202020204" pitchFamily="34" charset="0"/>
                 <a:cs typeface="Arial" panose="020B0604020202020204" pitchFamily="34" charset="0"/>
               </a:rPr>
@@ -7856,49 +7916,49 @@
           <a:p>
             <a:pPr algn="ctr"/>
             <a:r>
-              <a:rPr lang="en-US" dirty="0" err="1" smtClean="0">
+              <a:rPr lang="en-US" dirty="0" err="1">
                 <a:latin typeface="Arial" panose="020B0604020202020204" pitchFamily="34" charset="0"/>
                 <a:cs typeface="Arial" panose="020B0604020202020204" pitchFamily="34" charset="0"/>
               </a:rPr>
               <a:t>Ko</a:t>
             </a:r>
             <a:r>
-              <a:rPr lang="en-US" dirty="0" smtClean="0">
+              <a:rPr lang="en-US" dirty="0">
                 <a:latin typeface="Arial" panose="020B0604020202020204" pitchFamily="34" charset="0"/>
                 <a:cs typeface="Arial" panose="020B0604020202020204" pitchFamily="34" charset="0"/>
               </a:rPr>
               <a:t> </a:t>
             </a:r>
             <a:r>
-              <a:rPr lang="en-US" dirty="0" err="1" smtClean="0">
+              <a:rPr lang="en-US" dirty="0" err="1">
                 <a:latin typeface="Arial" panose="020B0604020202020204" pitchFamily="34" charset="0"/>
                 <a:cs typeface="Arial" panose="020B0604020202020204" pitchFamily="34" charset="0"/>
               </a:rPr>
               <a:t>cần</a:t>
             </a:r>
             <a:r>
-              <a:rPr lang="en-US" dirty="0" smtClean="0">
+              <a:rPr lang="en-US" dirty="0">
                 <a:latin typeface="Arial" panose="020B0604020202020204" pitchFamily="34" charset="0"/>
                 <a:cs typeface="Arial" panose="020B0604020202020204" pitchFamily="34" charset="0"/>
               </a:rPr>
               <a:t> </a:t>
             </a:r>
             <a:r>
-              <a:rPr lang="en-US" dirty="0" err="1" smtClean="0">
+              <a:rPr lang="en-US" dirty="0" err="1">
                 <a:latin typeface="Arial" panose="020B0604020202020204" pitchFamily="34" charset="0"/>
                 <a:cs typeface="Arial" panose="020B0604020202020204" pitchFamily="34" charset="0"/>
               </a:rPr>
               <a:t>nhân</a:t>
             </a:r>
             <a:r>
-              <a:rPr lang="en-US" dirty="0" smtClean="0">
+              <a:rPr lang="en-US" dirty="0">
                 <a:latin typeface="Arial" panose="020B0604020202020204" pitchFamily="34" charset="0"/>
                 <a:cs typeface="Arial" panose="020B0604020202020204" pitchFamily="34" charset="0"/>
               </a:rPr>
               <a:t> </a:t>
             </a:r>
             <a:r>
-              <a:rPr lang="en-US" dirty="0" err="1" smtClean="0">
+              <a:rPr lang="en-US" dirty="0" err="1">
                 <a:latin typeface="Arial" panose="020B0604020202020204" pitchFamily="34" charset="0"/>
                 <a:cs typeface="Arial" panose="020B0604020202020204" pitchFamily="34" charset="0"/>
               </a:rPr>
@@ -7921,13 +7981,6 @@
   <p:clrMapOvr>
     <a:masterClrMapping/>
   </p:clrMapOvr>
-  <p:timing>
-    <p:tnLst>
-      <p:par>
-        <p:cTn id="1" dur="indefinite" restart="never" nodeType="tmRoot"/>
-      </p:par>
-    </p:tnLst>
-  </p:timing>
 </p:sld>
 </file>
 
